--- a/Topic_D/Exam_Practice/TD-L04_Speaking_Workshop_Studying_Exams_and_Learning_Strategies.pptx
+++ b/Topic_D/Exam_Practice/TD-L04_Speaking_Workshop_Studying_Exams_and_Learning_Strategies.pptx
@@ -615,7 +615,11 @@
           <a:lstStyle/>
           <a:p>
             <a:r>
-              <a:rPr lang="en-US" dirty="0"/>
+              <a:rPr lang="ar-SA" dirty="0">
+                <a:latin typeface="Amiri" pitchFamily="2" charset="-78"/>
+                <a:ea typeface="Amiri" pitchFamily="2" charset="-78"/>
+                <a:cs typeface="Amiri" pitchFamily="2" charset="-78"/>
+              </a:rPr>
               <a:t>ROLE PLAY C (Develop) — after results day.
 SET-UP IN THE BREAKOUT ROOM: A = examiner (reads the left column ONLY — the questions, in order), B = candidate (sees the task column; Core may use the help column), C = observer (ticks the feedback checklist). 1 minute preparation, about 3 minutes speaking, 1 minute feedback, then rotate.
 Task ! is the unexpected question: in the exam the candidate has not seen it — the examiner should read it without warning.
@@ -707,7 +711,11 @@
           <a:lstStyle/>
           <a:p>
             <a:r>
-              <a:rPr lang="en-US" dirty="0"/>
+              <a:rPr lang="ar-SA" dirty="0">
+                <a:latin typeface="Amiri" pitchFamily="2" charset="-78"/>
+                <a:ea typeface="Amiri" pitchFamily="2" charset="-78"/>
+                <a:cs typeface="Amiri" pitchFamily="2" charset="-78"/>
+              </a:rPr>
               <a:t>ROLE PLAY D (Stretch) — a wellbeing assembly.
 SET-UP IN THE BREAKOUT ROOM: A = examiner (reads the left column ONLY — the questions, in order), B = candidate (sees the task column; Core may use the help column), C = observer (ticks the feedback checklist). 1 minute preparation, about 3 minutes speaking, 1 minute feedback, then rotate.
 Task ! is the unexpected question: in the exam the candidate has not seen it — the examiner should read it without warning.
@@ -1243,7 +1251,11 @@
           <a:lstStyle/>
           <a:p>
             <a:r>
-              <a:rPr lang="en-US" dirty="0"/>
+              <a:rPr lang="ar-SA" dirty="0">
+                <a:latin typeface="Amiri" pitchFamily="2" charset="-78"/>
+                <a:ea typeface="Amiri" pitchFamily="2" charset="-78"/>
+                <a:cs typeface="Amiri" pitchFamily="2" charset="-78"/>
+              </a:rPr>
               <a:t>TOPIC CONVERSATION — Core. Examiner asks the questions in order and may add “لِمَاذَا؟ / هَلْ يُمْكِنُ أَنْ تَشْرَحَ أَكْثَرَ؟” to push for more. Candidate aims for one full sentence per question.
 </a:t>
             </a:r>
@@ -1332,7 +1344,11 @@
           <a:lstStyle/>
           <a:p>
             <a:r>
-              <a:rPr lang="en-US" dirty="0"/>
+              <a:rPr lang="ar-SA" dirty="0">
+                <a:latin typeface="Amiri" pitchFamily="2" charset="-78"/>
+                <a:ea typeface="Amiri" pitchFamily="2" charset="-78"/>
+                <a:cs typeface="Amiri" pitchFamily="2" charset="-78"/>
+              </a:rPr>
               <a:t>TOPIC CONVERSATION — Develop. Examiner asks the questions in order and may add “لِمَاذَا؟ / هَلْ يُمْكِنُ أَنْ تَشْرَحَ أَكْثَرَ؟” to push for more. Candidate aims for two or three sentences, with a verbal noun and a past detail.
 </a:t>
             </a:r>
@@ -1421,7 +1437,11 @@
           <a:lstStyle/>
           <a:p>
             <a:r>
-              <a:rPr lang="en-US" dirty="0"/>
+              <a:rPr lang="ar-SA" dirty="0">
+                <a:latin typeface="Amiri" pitchFamily="2" charset="-78"/>
+                <a:ea typeface="Amiri" pitchFamily="2" charset="-78"/>
+                <a:cs typeface="Amiri" pitchFamily="2" charset="-78"/>
+              </a:rPr>
               <a:t>TOPIC CONVERSATION — Stretch. Examiner asks the questions in order and may add “لِمَاذَا؟ / هَلْ يُمْكِنُ أَنْ تَشْرَحَ أَكْثَرَ؟” to push for more. Candidate aims for a developed answer: opinion, balance, concession and a conditional.
 </a:t>
             </a:r>
@@ -1510,7 +1530,11 @@
           <a:lstStyle/>
           <a:p>
             <a:r>
-              <a:rPr lang="en-US" dirty="0"/>
+              <a:rPr lang="ar-SA" dirty="0">
+                <a:latin typeface="Amiri" pitchFamily="2" charset="-78"/>
+                <a:ea typeface="Amiri" pitchFamily="2" charset="-78"/>
+                <a:cs typeface="Amiri" pitchFamily="2" charset="-78"/>
+              </a:rPr>
               <a:t>WELCOME (1 min) — while students join.
 • Greet each student by name as they arrive: السَّلَامُ عَلَيْكُمْ. Take the register (Pastoral Tracker: attendance 0/1).
 • 2-MINUTE CHECK-IN (SEND training): a private chat to any student who seemed unsettled last lesson — “Are you okay today? 👍 / 👎”.
@@ -2224,7 +2248,11 @@
           <a:lstStyle/>
           <a:p>
             <a:r>
-              <a:rPr lang="en-US" dirty="0"/>
+              <a:rPr lang="ar-SA" dirty="0">
+                <a:latin typeface="Amiri" pitchFamily="2" charset="-78"/>
+                <a:ea typeface="Amiri" pitchFamily="2" charset="-78"/>
+                <a:cs typeface="Amiri" pitchFamily="2" charset="-78"/>
+              </a:rPr>
               <a:t>TEACH (3 min). Role play = precise and complete; conversation = develop. Choral repetition of the repair phrases. To a girl: تُعِيدِي.</a:t>
             </a:r>
             <a:endParaRPr lang="en-US" dirty="0"/>
@@ -2312,7 +2340,11 @@
           <a:lstStyle/>
           <a:p>
             <a:r>
-              <a:rPr lang="en-US" dirty="0"/>
+              <a:rPr lang="ar-SA" dirty="0">
+                <a:latin typeface="Amiri" pitchFamily="2" charset="-78"/>
+                <a:ea typeface="Amiri" pitchFamily="2" charset="-78"/>
+                <a:cs typeface="Amiri" pitchFamily="2" charset="-78"/>
+              </a:rPr>
               <a:t>LANGUAGE BANK (2 min) — the verbal noun names the activity: أُرَاجِعُ → المُرَاجَعَةُ مُهِمَّةٌ · أُرَكِّزُ → التَّرْكِيزُ صَعْبٌ · أُنَظِّمُ وَقْتِي → تَنْظِيمُ الوَقْتِ مُفِيدٌ.</a:t>
             </a:r>
             <a:endParaRPr lang="en-US" dirty="0"/>
@@ -2400,7 +2432,11 @@
           <a:lstStyle/>
           <a:p>
             <a:r>
-              <a:rPr lang="en-US" dirty="0"/>
+              <a:rPr lang="ar-SA" dirty="0">
+                <a:latin typeface="Amiri" pitchFamily="2" charset="-78"/>
+                <a:ea typeface="Amiri" pitchFamily="2" charset="-78"/>
+                <a:cs typeface="Amiri" pitchFamily="2" charset="-78"/>
+              </a:rPr>
               <a:t>LANGUAGE BANK (2 min) — advice: يَنْبَغِي أَنْ تُرَاجِعَ (fatḥa) · لَا تَسْهَرْ (sukūn). إِنَّ + noun in the accusative: إِنَّ النَّوْمَ ضَرُورِيٌّ. كَانَ + predicate in the accusative: كَانَ الامْتِحَانُ طَوِيلًا.</a:t>
             </a:r>
             <a:endParaRPr lang="en-US" dirty="0"/>
@@ -2576,7 +2612,11 @@
           <a:lstStyle/>
           <a:p>
             <a:r>
-              <a:rPr lang="en-US" dirty="0"/>
+              <a:rPr lang="ar-SA" dirty="0">
+                <a:latin typeface="Amiri" pitchFamily="2" charset="-78"/>
+                <a:ea typeface="Amiri" pitchFamily="2" charset="-78"/>
+                <a:cs typeface="Amiri" pitchFamily="2" charset="-78"/>
+              </a:rPr>
               <a:t>ROLE PLAY A (Core) — a revision chat.
 SET-UP IN THE BREAKOUT ROOM: A = examiner (reads the left column ONLY — the questions, in order), B = candidate (sees the task column; Core may use the help column), C = observer (ticks the feedback checklist). 1 minute preparation, about 3 minutes speaking, 1 minute feedback, then rotate.
 Task ! is the unexpected question: in the exam the candidate has not seen it — the examiner should read it without warning.
@@ -2668,7 +2708,11 @@
           <a:lstStyle/>
           <a:p>
             <a:r>
-              <a:rPr lang="en-US" dirty="0"/>
+              <a:rPr lang="ar-SA" dirty="0">
+                <a:latin typeface="Amiri" pitchFamily="2" charset="-78"/>
+                <a:ea typeface="Amiri" pitchFamily="2" charset="-78"/>
+                <a:cs typeface="Amiri" pitchFamily="2" charset="-78"/>
+              </a:rPr>
               <a:t>ROLE PLAY B (Core+) — a study-skills session.
 SET-UP IN THE BREAKOUT ROOM: A = examiner (reads the left column ONLY — the questions, in order), B = candidate (sees the task column; Core may use the help column), C = observer (ticks the feedback checklist). 1 minute preparation, about 3 minutes speaking, 1 minute feedback, then rotate.
 Task ! is the unexpected question: in the exam the candidate has not seen it — the examiner should read it without warning.
@@ -3156,6 +3200,7 @@
                   <a:srgbClr val="D4AF37"/>
                 </a:solidFill>
                 <a:latin typeface="Amiri" pitchFamily="2" charset="-78"/>
+                <a:ea typeface="Amiri" pitchFamily="2" charset="-78"/>
                 <a:cs typeface="Amiri" pitchFamily="2" charset="-78"/>
               </a:rPr>
               <a:t>م</a:t>
@@ -3362,6 +3407,7 @@
                   <a:srgbClr val="D4AF37"/>
                 </a:solidFill>
                 <a:latin typeface="Amiri" pitchFamily="2" charset="-78"/>
+                <a:ea typeface="Amiri" pitchFamily="2" charset="-78"/>
                 <a:cs typeface="Amiri" pitchFamily="2" charset="-78"/>
               </a:rPr>
               <a:t>وَرْشَةُ التَّحَدُّثِ — الدِّرَاسَةُ وَالامْتِحَانَاتُ</a:t>
@@ -3413,6 +3459,7 @@
                   <a:srgbClr val="C6D2E6"/>
                 </a:solidFill>
                 <a:latin typeface="Amiri" pitchFamily="2" charset="-78"/>
+                <a:ea typeface="Amiri" pitchFamily="2" charset="-78"/>
                 <a:cs typeface="Amiri" pitchFamily="2" charset="-78"/>
               </a:rPr>
               <a:t>يَنْبَغِي أَنْ</a:t>
@@ -3439,6 +3486,7 @@
                   <a:srgbClr val="C6D2E6"/>
                 </a:solidFill>
                 <a:latin typeface="Amiri" pitchFamily="2" charset="-78"/>
+                <a:ea typeface="Amiri" pitchFamily="2" charset="-78"/>
                 <a:cs typeface="Amiri" pitchFamily="2" charset="-78"/>
               </a:rPr>
               <a:t>مِنَ المُفِيدِ أَنْ</a:t>
@@ -3465,6 +3513,7 @@
                   <a:srgbClr val="C6D2E6"/>
                 </a:solidFill>
                 <a:latin typeface="Amiri" pitchFamily="2" charset="-78"/>
+                <a:ea typeface="Amiri" pitchFamily="2" charset="-78"/>
                 <a:cs typeface="Amiri" pitchFamily="2" charset="-78"/>
               </a:rPr>
               <a:t>لَا تَسْهَرْ</a:t>
@@ -3491,6 +3540,7 @@
                   <a:srgbClr val="C6D2E6"/>
                 </a:solidFill>
                 <a:latin typeface="Amiri" pitchFamily="2" charset="-78"/>
+                <a:ea typeface="Amiri" pitchFamily="2" charset="-78"/>
                 <a:cs typeface="Amiri" pitchFamily="2" charset="-78"/>
               </a:rPr>
               <a:t>المُرَاجَعَةُ</a:t>
@@ -3517,6 +3567,7 @@
                   <a:srgbClr val="C6D2E6"/>
                 </a:solidFill>
                 <a:latin typeface="Amiri" pitchFamily="2" charset="-78"/>
+                <a:ea typeface="Amiri" pitchFamily="2" charset="-78"/>
                 <a:cs typeface="Amiri" pitchFamily="2" charset="-78"/>
               </a:rPr>
               <a:t>التَّرْكِيزُ</a:t>
@@ -3543,6 +3594,7 @@
                   <a:srgbClr val="C6D2E6"/>
                 </a:solidFill>
                 <a:latin typeface="Amiri" pitchFamily="2" charset="-78"/>
+                <a:ea typeface="Amiri" pitchFamily="2" charset="-78"/>
                 <a:cs typeface="Amiri" pitchFamily="2" charset="-78"/>
               </a:rPr>
               <a:t>كَانَ</a:t>
@@ -3975,6 +4027,7 @@
                   <a:srgbClr val="D4AF37"/>
                 </a:solidFill>
                 <a:latin typeface="Amiri" pitchFamily="2" charset="-78"/>
+                <a:ea typeface="Amiri" pitchFamily="2" charset="-78"/>
                 <a:cs typeface="Amiri" pitchFamily="2" charset="-78"/>
               </a:rPr>
               <a:t>م</a:t>
@@ -4295,6 +4348,7 @@
                   <a:srgbClr val="8A6D1E"/>
                 </a:solidFill>
                 <a:latin typeface="Amiri" pitchFamily="2" charset="-78"/>
+                <a:ea typeface="Amiri" pitchFamily="2" charset="-78"/>
                 <a:cs typeface="Amiri" pitchFamily="2" charset="-78"/>
               </a:rPr>
               <a:t>بَعْدَ الامْتِحَانَاتِ التَّجْرِيبِيَّةِ</a:t>
@@ -4575,6 +4629,7 @@
                   <a:srgbClr val="1B3B6F"/>
                 </a:solidFill>
                 <a:latin typeface="Amiri" pitchFamily="2" charset="-78"/>
+                <a:ea typeface="Amiri" pitchFamily="2" charset="-78"/>
                 <a:cs typeface="Amiri" pitchFamily="2" charset="-78"/>
               </a:rPr>
               <a:t>كَانَتْ … فِي … لٰكِنَّ …</a:t>
@@ -4651,6 +4706,7 @@
                   <a:srgbClr val="1B3B6F"/>
                 </a:solidFill>
                 <a:latin typeface="Amiri" pitchFamily="2" charset="-78"/>
+                <a:ea typeface="Amiri" pitchFamily="2" charset="-78"/>
                 <a:cs typeface="Amiri" pitchFamily="2" charset="-78"/>
               </a:rPr>
               <a:t>كَيْفَ كَانَتْ نَتَائِجُكَ؟</a:t>
@@ -4754,6 +4810,7 @@
                   <a:srgbClr val="1B3B6F"/>
                 </a:solidFill>
                 <a:latin typeface="Amiri" pitchFamily="2" charset="-78"/>
+                <a:ea typeface="Amiri" pitchFamily="2" charset="-78"/>
                 <a:cs typeface="Amiri" pitchFamily="2" charset="-78"/>
               </a:rPr>
               <a:t>بِسَبَبِ قِلَّةِ … وَ…</a:t>
@@ -4830,6 +4887,7 @@
                   <a:srgbClr val="1B3B6F"/>
                 </a:solidFill>
                 <a:latin typeface="Amiri" pitchFamily="2" charset="-78"/>
+                <a:ea typeface="Amiri" pitchFamily="2" charset="-78"/>
                 <a:cs typeface="Amiri" pitchFamily="2" charset="-78"/>
               </a:rPr>
               <a:t>لِمَاذَا فِي رَأْيِكَ؟</a:t>
@@ -4933,6 +4991,7 @@
                   <a:srgbClr val="1B3B6F"/>
                 </a:solidFill>
                 <a:latin typeface="Amiri" pitchFamily="2" charset="-78"/>
+                <a:ea typeface="Amiri" pitchFamily="2" charset="-78"/>
                 <a:cs typeface="Amiri" pitchFamily="2" charset="-78"/>
               </a:rPr>
               <a:t>صَنَعْتُ … وَكُنْتُ …</a:t>
@@ -5009,6 +5068,7 @@
                   <a:srgbClr val="1B3B6F"/>
                 </a:solidFill>
                 <a:latin typeface="Amiri" pitchFamily="2" charset="-78"/>
+                <a:ea typeface="Amiri" pitchFamily="2" charset="-78"/>
                 <a:cs typeface="Amiri" pitchFamily="2" charset="-78"/>
               </a:rPr>
               <a:t>وَكَيْفَ رَاجَعْتَ لِلْعَرَبِيَّةِ؟</a:t>
@@ -5112,6 +5172,7 @@
                   <a:srgbClr val="1B3B6F"/>
                 </a:solidFill>
                 <a:latin typeface="Amiri" pitchFamily="2" charset="-78"/>
+                <a:ea typeface="Amiri" pitchFamily="2" charset="-78"/>
                 <a:cs typeface="Amiri" pitchFamily="2" charset="-78"/>
               </a:rPr>
               <a:t>إِنَّ … لِذٰلِكَ سَأَحُلُّ … لِكَيْ …</a:t>
@@ -5188,6 +5249,7 @@
                   <a:srgbClr val="1B3B6F"/>
                 </a:solidFill>
                 <a:latin typeface="Amiri" pitchFamily="2" charset="-78"/>
+                <a:ea typeface="Amiri" pitchFamily="2" charset="-78"/>
                 <a:cs typeface="Amiri" pitchFamily="2" charset="-78"/>
               </a:rPr>
               <a:t>مَا خُطَّتُكَ لِلرِّيَاضِيَّاتِ إِذَنْ؟</a:t>
@@ -5291,6 +5353,7 @@
                   <a:srgbClr val="1B3B6F"/>
                 </a:solidFill>
                 <a:latin typeface="Amiri" pitchFamily="2" charset="-78"/>
+                <a:ea typeface="Amiri" pitchFamily="2" charset="-78"/>
                 <a:cs typeface="Amiri" pitchFamily="2" charset="-78"/>
               </a:rPr>
               <a:t>لَا تُؤَجِّلِ … وَمِنَ المُفِيدِ أَنْ …</a:t>
@@ -5367,6 +5430,7 @@
                   <a:srgbClr val="1B3B6F"/>
                 </a:solidFill>
                 <a:latin typeface="Amiri" pitchFamily="2" charset="-78"/>
+                <a:ea typeface="Amiri" pitchFamily="2" charset="-78"/>
                 <a:cs typeface="Amiri" pitchFamily="2" charset="-78"/>
               </a:rPr>
               <a:t>وَمَاذَا تَقُولُ لِطَالِبٍ أَصْغَرَ مِنْكَ؟</a:t>
@@ -5576,6 +5640,7 @@
                   <a:srgbClr val="D4AF37"/>
                 </a:solidFill>
                 <a:latin typeface="Amiri" pitchFamily="2" charset="-78"/>
+                <a:ea typeface="Amiri" pitchFamily="2" charset="-78"/>
                 <a:cs typeface="Amiri" pitchFamily="2" charset="-78"/>
               </a:rPr>
               <a:t>م</a:t>
@@ -5896,6 +5961,7 @@
                   <a:srgbClr val="8A6D1E"/>
                 </a:solidFill>
                 <a:latin typeface="Amiri" pitchFamily="2" charset="-78"/>
+                <a:ea typeface="Amiri" pitchFamily="2" charset="-78"/>
                 <a:cs typeface="Amiri" pitchFamily="2" charset="-78"/>
               </a:rPr>
               <a:t>ضَغْطُ الامْتِحَانَاتِ</a:t>
@@ -6176,6 +6242,7 @@
                   <a:srgbClr val="1B3B6F"/>
                 </a:solidFill>
                 <a:latin typeface="Amiri" pitchFamily="2" charset="-78"/>
+                <a:ea typeface="Amiri" pitchFamily="2" charset="-78"/>
                 <a:cs typeface="Amiri" pitchFamily="2" charset="-78"/>
               </a:rPr>
               <a:t>لِأَنَّ … مِمَّا يُؤَدِّي إِلَى …</a:t>
@@ -6252,6 +6319,7 @@
                   <a:srgbClr val="1B3B6F"/>
                 </a:solidFill>
                 <a:latin typeface="Amiri" pitchFamily="2" charset="-78"/>
+                <a:ea typeface="Amiri" pitchFamily="2" charset="-78"/>
                 <a:cs typeface="Amiri" pitchFamily="2" charset="-78"/>
               </a:rPr>
               <a:t>لِمَاذَا يَشْعُرُ الطُّلَّابُ بِالقَلَقِ قَبْلَ الامْتِحَانَاتِ؟</a:t>
@@ -6355,6 +6423,7 @@
                   <a:srgbClr val="1B3B6F"/>
                 </a:solidFill>
                 <a:latin typeface="Amiri" pitchFamily="2" charset="-78"/>
+                <a:ea typeface="Amiri" pitchFamily="2" charset="-78"/>
                 <a:cs typeface="Amiri" pitchFamily="2" charset="-78"/>
               </a:rPr>
               <a:t>نَعَمْ، كُنْتُ … إِلَى أَنْ …</a:t>
@@ -6431,6 +6500,7 @@
                   <a:srgbClr val="1B3B6F"/>
                 </a:solidFill>
                 <a:latin typeface="Amiri" pitchFamily="2" charset="-78"/>
+                <a:ea typeface="Amiri" pitchFamily="2" charset="-78"/>
                 <a:cs typeface="Amiri" pitchFamily="2" charset="-78"/>
               </a:rPr>
               <a:t>هَلْ مَرَرْتَ بِتَجْرِبَةٍ كَهٰذِهِ؟</a:t>
@@ -6534,6 +6604,7 @@
                   <a:srgbClr val="1B3B6F"/>
                 </a:solidFill>
                 <a:latin typeface="Amiri" pitchFamily="2" charset="-78"/>
+                <a:ea typeface="Amiri" pitchFamily="2" charset="-78"/>
                 <a:cs typeface="Amiri" pitchFamily="2" charset="-78"/>
               </a:rPr>
               <a:t>أَوَّلًا … ثَانِيًا … أَخِيرًا …</a:t>
@@ -6610,6 +6681,7 @@
                   <a:srgbClr val="1B3B6F"/>
                 </a:solidFill>
                 <a:latin typeface="Amiri" pitchFamily="2" charset="-78"/>
+                <a:ea typeface="Amiri" pitchFamily="2" charset="-78"/>
                 <a:cs typeface="Amiri" pitchFamily="2" charset="-78"/>
               </a:rPr>
               <a:t>مَا نَصِيحَتُكَ لِلطُّلَّابِ؟</a:t>
@@ -6713,6 +6785,7 @@
                   <a:srgbClr val="1B3B6F"/>
                 </a:solidFill>
                 <a:latin typeface="Amiri" pitchFamily="2" charset="-78"/>
+                <a:ea typeface="Amiri" pitchFamily="2" charset="-78"/>
                 <a:cs typeface="Amiri" pitchFamily="2" charset="-78"/>
               </a:rPr>
               <a:t>صَحِيحٌ أَنَّ … غَيْرَ أَنَّ …</a:t>
@@ -6789,6 +6862,7 @@
                   <a:srgbClr val="1B3B6F"/>
                 </a:solidFill>
                 <a:latin typeface="Amiri" pitchFamily="2" charset="-78"/>
+                <a:ea typeface="Amiri" pitchFamily="2" charset="-78"/>
                 <a:cs typeface="Amiri" pitchFamily="2" charset="-78"/>
               </a:rPr>
               <a:t>أَلَيْسَتِ الامْتِحَانَاتُ ضَرُورِيَّةً؟</a:t>
@@ -6892,6 +6966,7 @@
                   <a:srgbClr val="1B3B6F"/>
                 </a:solidFill>
                 <a:latin typeface="Amiri" pitchFamily="2" charset="-78"/>
+                <a:ea typeface="Amiri" pitchFamily="2" charset="-78"/>
                 <a:cs typeface="Amiri" pitchFamily="2" charset="-78"/>
               </a:rPr>
               <a:t>لَوْ أَلْغَيْتُهَا، لَوَضَعْتُ …</a:t>
@@ -6968,6 +7043,7 @@
                   <a:srgbClr val="1B3B6F"/>
                 </a:solidFill>
                 <a:latin typeface="Amiri" pitchFamily="2" charset="-78"/>
+                <a:ea typeface="Amiri" pitchFamily="2" charset="-78"/>
                 <a:cs typeface="Amiri" pitchFamily="2" charset="-78"/>
               </a:rPr>
               <a:t>لَوْ أَلْغَيْتَ الامْتِحَانَاتِ، مَاذَا تَضَعُ مَكَانَهَا؟</a:t>
@@ -7177,6 +7253,7 @@
                   <a:srgbClr val="D4AF37"/>
                 </a:solidFill>
                 <a:latin typeface="Amiri" pitchFamily="2" charset="-78"/>
+                <a:ea typeface="Amiri" pitchFamily="2" charset="-78"/>
                 <a:cs typeface="Amiri" pitchFamily="2" charset="-78"/>
               </a:rPr>
               <a:t>م</a:t>
@@ -7497,6 +7574,7 @@
                   <a:srgbClr val="8A6D1E"/>
                 </a:solidFill>
                 <a:latin typeface="Amiri" pitchFamily="2" charset="-78"/>
+                <a:ea typeface="Amiri" pitchFamily="2" charset="-78"/>
                 <a:cs typeface="Amiri" pitchFamily="2" charset="-78"/>
               </a:rPr>
               <a:t>وَرَقَةُ المُلَاحِظِ</a:t>
@@ -8967,6 +9045,7 @@
                   <a:srgbClr val="D4AF37"/>
                 </a:solidFill>
                 <a:latin typeface="Amiri" pitchFamily="2" charset="-78"/>
+                <a:ea typeface="Amiri" pitchFamily="2" charset="-78"/>
                 <a:cs typeface="Amiri" pitchFamily="2" charset="-78"/>
               </a:rPr>
               <a:t>م</a:t>
@@ -9287,6 +9366,7 @@
                   <a:srgbClr val="8A6D1E"/>
                 </a:solidFill>
                 <a:latin typeface="Amiri" pitchFamily="2" charset="-78"/>
+                <a:ea typeface="Amiri" pitchFamily="2" charset="-78"/>
                 <a:cs typeface="Amiri" pitchFamily="2" charset="-78"/>
               </a:rPr>
               <a:t>نَمُوذَجُ الإِجَابَةِ</a:t>
@@ -9529,6 +9609,7 @@
                   <a:srgbClr val="1B3B6F"/>
                 </a:solidFill>
                 <a:latin typeface="Amiri" pitchFamily="2" charset="-78"/>
+                <a:ea typeface="Amiri" pitchFamily="2" charset="-78"/>
                 <a:cs typeface="Amiri" pitchFamily="2" charset="-78"/>
               </a:rPr>
               <a:t>امْتِحَانِي يَوْمَ الاثْنَيْنِ القَادِمِ.</a:t>
@@ -9605,6 +9686,7 @@
                   <a:srgbClr val="1B3B6F"/>
                 </a:solidFill>
                 <a:latin typeface="Amiri" pitchFamily="2" charset="-78"/>
+                <a:ea typeface="Amiri" pitchFamily="2" charset="-78"/>
                 <a:cs typeface="Amiri" pitchFamily="2" charset="-78"/>
               </a:rPr>
               <a:t>مَتَى امْتِحَانُكَ؟</a:t>
@@ -9708,6 +9790,7 @@
                   <a:srgbClr val="1B3B6F"/>
                 </a:solidFill>
                 <a:latin typeface="Amiri" pitchFamily="2" charset="-78"/>
+                <a:ea typeface="Amiri" pitchFamily="2" charset="-78"/>
                 <a:cs typeface="Amiri" pitchFamily="2" charset="-78"/>
               </a:rPr>
               <a:t>فِي الكِيمْيَاءِ.</a:t>
@@ -9784,6 +9867,7 @@
                   <a:srgbClr val="1B3B6F"/>
                 </a:solidFill>
                 <a:latin typeface="Amiri" pitchFamily="2" charset="-78"/>
+                <a:ea typeface="Amiri" pitchFamily="2" charset="-78"/>
                 <a:cs typeface="Amiri" pitchFamily="2" charset="-78"/>
               </a:rPr>
               <a:t>فِي أَيِّ مَادَّةٍ؟</a:t>
@@ -9887,6 +9971,7 @@
                   <a:srgbClr val="1B3B6F"/>
                 </a:solidFill>
                 <a:latin typeface="Amiri" pitchFamily="2" charset="-78"/>
+                <a:ea typeface="Amiri" pitchFamily="2" charset="-78"/>
                 <a:cs typeface="Amiri" pitchFamily="2" charset="-78"/>
               </a:rPr>
               <a:t>أُرَاجِعُ كُلَّ مَسَاءٍ، وَأَكْتُبُ مُلَخَّصَاتٍ قَصِيرَةً.</a:t>
@@ -9963,6 +10048,7 @@
                   <a:srgbClr val="1B3B6F"/>
                 </a:solidFill>
                 <a:latin typeface="Amiri" pitchFamily="2" charset="-78"/>
+                <a:ea typeface="Amiri" pitchFamily="2" charset="-78"/>
                 <a:cs typeface="Amiri" pitchFamily="2" charset="-78"/>
               </a:rPr>
               <a:t>كَيْفَ تُرَاجِعُ؟</a:t>
@@ -10066,6 +10152,7 @@
                   <a:srgbClr val="1B3B6F"/>
                 </a:solidFill>
                 <a:latin typeface="Amiri" pitchFamily="2" charset="-78"/>
+                <a:ea typeface="Amiri" pitchFamily="2" charset="-78"/>
                 <a:cs typeface="Amiri" pitchFamily="2" charset="-78"/>
               </a:rPr>
               <a:t>يَنْبَغِي أَنْ تَنَامَ جَيِّدًا قَبْلَ الامْتِحَانِ.</a:t>
@@ -10142,6 +10229,7 @@
                   <a:srgbClr val="1B3B6F"/>
                 </a:solidFill>
                 <a:latin typeface="Amiri" pitchFamily="2" charset="-78"/>
+                <a:ea typeface="Amiri" pitchFamily="2" charset="-78"/>
                 <a:cs typeface="Amiri" pitchFamily="2" charset="-78"/>
               </a:rPr>
               <a:t>أَنَا قَلِقٌ جِدًّا.</a:t>
@@ -10245,6 +10333,7 @@
                   <a:srgbClr val="1B3B6F"/>
                 </a:solidFill>
                 <a:latin typeface="Amiri" pitchFamily="2" charset="-78"/>
+                <a:ea typeface="Amiri" pitchFamily="2" charset="-78"/>
                 <a:cs typeface="Amiri" pitchFamily="2" charset="-78"/>
               </a:rPr>
               <a:t>نَعَمْ، فِي المَكْتَبَةِ السَّاعَةَ الرَّابِعَةَ.</a:t>
@@ -10321,6 +10410,7 @@
                   <a:srgbClr val="1B3B6F"/>
                 </a:solidFill>
                 <a:latin typeface="Amiri" pitchFamily="2" charset="-78"/>
+                <a:ea typeface="Amiri" pitchFamily="2" charset="-78"/>
                 <a:cs typeface="Amiri" pitchFamily="2" charset="-78"/>
               </a:rPr>
               <a:t>هَلْ نَدْرُسُ مَعًا غَدًا؟</a:t>
@@ -10530,6 +10620,7 @@
                   <a:srgbClr val="D4AF37"/>
                 </a:solidFill>
                 <a:latin typeface="Amiri" pitchFamily="2" charset="-78"/>
+                <a:ea typeface="Amiri" pitchFamily="2" charset="-78"/>
                 <a:cs typeface="Amiri" pitchFamily="2" charset="-78"/>
               </a:rPr>
               <a:t>م</a:t>
@@ -10850,6 +10941,7 @@
                   <a:srgbClr val="8A6D1E"/>
                 </a:solidFill>
                 <a:latin typeface="Amiri" pitchFamily="2" charset="-78"/>
+                <a:ea typeface="Amiri" pitchFamily="2" charset="-78"/>
                 <a:cs typeface="Amiri" pitchFamily="2" charset="-78"/>
               </a:rPr>
               <a:t>نَمُوذَجُ الإِجَابَةِ</a:t>
@@ -11092,6 +11184,7 @@
                   <a:srgbClr val="1B3B6F"/>
                 </a:solidFill>
                 <a:latin typeface="Amiri" pitchFamily="2" charset="-78"/>
+                <a:ea typeface="Amiri" pitchFamily="2" charset="-78"/>
                 <a:cs typeface="Amiri" pitchFamily="2" charset="-78"/>
               </a:rPr>
               <a:t>لَا أَسْتَطِيعُ أَنْ أُرَكِّزَ أَكْثَرَ مِنْ عِشْرِينَ دَقِيقَةً.</a:t>
@@ -11168,6 +11261,7 @@
                   <a:srgbClr val="1B3B6F"/>
                 </a:solidFill>
                 <a:latin typeface="Amiri" pitchFamily="2" charset="-78"/>
+                <a:ea typeface="Amiri" pitchFamily="2" charset="-78"/>
                 <a:cs typeface="Amiri" pitchFamily="2" charset="-78"/>
               </a:rPr>
               <a:t>مَا المُشْكِلَةُ؟</a:t>
@@ -11271,6 +11365,7 @@
                   <a:srgbClr val="1B3B6F"/>
                 </a:solidFill>
                 <a:latin typeface="Amiri" pitchFamily="2" charset="-78"/>
+                <a:ea typeface="Amiri" pitchFamily="2" charset="-78"/>
                 <a:cs typeface="Amiri" pitchFamily="2" charset="-78"/>
               </a:rPr>
               <a:t>أُرَاجِعُ فِي غُرْفَتِي، وَهَاتِفِي بِجَانِبِي.</a:t>
@@ -11347,6 +11442,7 @@
                   <a:srgbClr val="1B3B6F"/>
                 </a:solidFill>
                 <a:latin typeface="Amiri" pitchFamily="2" charset="-78"/>
+                <a:ea typeface="Amiri" pitchFamily="2" charset="-78"/>
                 <a:cs typeface="Amiri" pitchFamily="2" charset="-78"/>
               </a:rPr>
               <a:t>وَأَيْنَ تُرَاجِعُ؟</a:t>
@@ -11450,6 +11546,7 @@
                   <a:srgbClr val="1B3B6F"/>
                 </a:solidFill>
                 <a:latin typeface="Amiri" pitchFamily="2" charset="-78"/>
+                <a:ea typeface="Amiri" pitchFamily="2" charset="-78"/>
                 <a:cs typeface="Amiri" pitchFamily="2" charset="-78"/>
               </a:rPr>
               <a:t>إِذَنْ مَاذَا يَنْبَغِي أَنْ أَفْعَلَ؟</a:t>
@@ -11526,6 +11623,7 @@
                   <a:srgbClr val="1B3B6F"/>
                 </a:solidFill>
                 <a:latin typeface="Amiri" pitchFamily="2" charset="-78"/>
+                <a:ea typeface="Amiri" pitchFamily="2" charset="-78"/>
                 <a:cs typeface="Amiri" pitchFamily="2" charset="-78"/>
               </a:rPr>
               <a:t>هٰذَا هُوَ السَّبَبُ!</a:t>
@@ -11629,6 +11727,7 @@
                   <a:srgbClr val="1B3B6F"/>
                 </a:solidFill>
                 <a:latin typeface="Amiri" pitchFamily="2" charset="-78"/>
+                <a:ea typeface="Amiri" pitchFamily="2" charset="-78"/>
                 <a:cs typeface="Amiri" pitchFamily="2" charset="-78"/>
               </a:rPr>
               <a:t>فِكْرَةٌ جَيِّدَةٌ. سَأُجَرِّبُ المُرَاجَعَةَ نِصْفَ سَاعَةٍ، ثُمَّ اسْتِرَاحَةً لِمُدَّةِ خَمْسِ دَقَائِقَ.</a:t>
@@ -11705,6 +11804,7 @@
                   <a:srgbClr val="1B3B6F"/>
                 </a:solidFill>
                 <a:latin typeface="Amiri" pitchFamily="2" charset="-78"/>
+                <a:ea typeface="Amiri" pitchFamily="2" charset="-78"/>
                 <a:cs typeface="Amiri" pitchFamily="2" charset="-78"/>
               </a:rPr>
               <a:t>ضَعِ الهَاتِفَ فِي غُرْفَةٍ أُخْرَى، وَخُذْ اسْتِرَاحَةً قَصِيرَةً.</a:t>
@@ -11808,6 +11908,7 @@
                   <a:srgbClr val="1B3B6F"/>
                 </a:solidFill>
                 <a:latin typeface="Amiri" pitchFamily="2" charset="-78"/>
+                <a:ea typeface="Amiri" pitchFamily="2" charset="-78"/>
                 <a:cs typeface="Amiri" pitchFamily="2" charset="-78"/>
               </a:rPr>
               <a:t>كَانَ صَعْبًا، لِأَنِّي لَمْ أُرَاجِعْ بِشَكْلٍ مُنَظَّمٍ.</a:t>
@@ -11884,6 +11985,7 @@
                   <a:srgbClr val="1B3B6F"/>
                 </a:solidFill>
                 <a:latin typeface="Amiri" pitchFamily="2" charset="-78"/>
+                <a:ea typeface="Amiri" pitchFamily="2" charset="-78"/>
                 <a:cs typeface="Amiri" pitchFamily="2" charset="-78"/>
               </a:rPr>
               <a:t>كَيْفَ كَانَ امْتِحَانُكَ الأَخِيرُ؟</a:t>
@@ -12093,6 +12195,7 @@
                   <a:srgbClr val="D4AF37"/>
                 </a:solidFill>
                 <a:latin typeface="Amiri" pitchFamily="2" charset="-78"/>
+                <a:ea typeface="Amiri" pitchFamily="2" charset="-78"/>
                 <a:cs typeface="Amiri" pitchFamily="2" charset="-78"/>
               </a:rPr>
               <a:t>م</a:t>
@@ -12413,6 +12516,7 @@
                   <a:srgbClr val="8A6D1E"/>
                 </a:solidFill>
                 <a:latin typeface="Amiri" pitchFamily="2" charset="-78"/>
+                <a:ea typeface="Amiri" pitchFamily="2" charset="-78"/>
                 <a:cs typeface="Amiri" pitchFamily="2" charset="-78"/>
               </a:rPr>
               <a:t>نَمُوذَجُ الإِجَابَةِ</a:t>
@@ -12655,6 +12759,7 @@
                   <a:srgbClr val="1B3B6F"/>
                 </a:solidFill>
                 <a:latin typeface="Amiri" pitchFamily="2" charset="-78"/>
+                <a:ea typeface="Amiri" pitchFamily="2" charset="-78"/>
                 <a:cs typeface="Amiri" pitchFamily="2" charset="-78"/>
               </a:rPr>
               <a:t>كَانَتْ جَيِّدَةً فِي العَرَبِيَّةِ وَالتَّارِيخِ، لٰكِنَّ دَرَجَتِي فِي الرِّيَاضِيَّاتِ كَانَتْ مُخَيِّبَةً.</a:t>
@@ -12731,6 +12836,7 @@
                   <a:srgbClr val="1B3B6F"/>
                 </a:solidFill>
                 <a:latin typeface="Amiri" pitchFamily="2" charset="-78"/>
+                <a:ea typeface="Amiri" pitchFamily="2" charset="-78"/>
                 <a:cs typeface="Amiri" pitchFamily="2" charset="-78"/>
               </a:rPr>
               <a:t>كَيْفَ كَانَتْ نَتَائِجُكَ؟</a:t>
@@ -12834,6 +12940,7 @@
                   <a:srgbClr val="1B3B6F"/>
                 </a:solidFill>
                 <a:latin typeface="Amiri" pitchFamily="2" charset="-78"/>
+                <a:ea typeface="Amiri" pitchFamily="2" charset="-78"/>
                 <a:cs typeface="Amiri" pitchFamily="2" charset="-78"/>
               </a:rPr>
               <a:t>بِسَبَبِ قِلَّةِ التَّمَارِينِ، وَتَأْجِيلِ المُرَاجَعَةِ إِلَى آخِرِ أُسْبُوعٍ.</a:t>
@@ -12910,6 +13017,7 @@
                   <a:srgbClr val="1B3B6F"/>
                 </a:solidFill>
                 <a:latin typeface="Amiri" pitchFamily="2" charset="-78"/>
+                <a:ea typeface="Amiri" pitchFamily="2" charset="-78"/>
                 <a:cs typeface="Amiri" pitchFamily="2" charset="-78"/>
               </a:rPr>
               <a:t>لِمَاذَا فِي رَأْيِكَ؟</a:t>
@@ -13013,6 +13121,7 @@
                   <a:srgbClr val="1B3B6F"/>
                 </a:solidFill>
                 <a:latin typeface="Amiri" pitchFamily="2" charset="-78"/>
+                <a:ea typeface="Amiri" pitchFamily="2" charset="-78"/>
                 <a:cs typeface="Amiri" pitchFamily="2" charset="-78"/>
               </a:rPr>
               <a:t>صَنَعْتُ بِطَاقَاتٍ لِلْمُفْرَدَاتِ، وَكُنْتُ أُرَاجِعُهَا عَشْرَ دَقَائِقَ كُلَّ صَبَاحٍ فِي الحَافِلَةِ.</a:t>
@@ -13089,6 +13198,7 @@
                   <a:srgbClr val="1B3B6F"/>
                 </a:solidFill>
                 <a:latin typeface="Amiri" pitchFamily="2" charset="-78"/>
+                <a:ea typeface="Amiri" pitchFamily="2" charset="-78"/>
                 <a:cs typeface="Amiri" pitchFamily="2" charset="-78"/>
               </a:rPr>
               <a:t>وَكَيْفَ رَاجَعْتَ لِلْعَرَبِيَّةِ؟</a:t>
@@ -13192,6 +13302,7 @@
                   <a:srgbClr val="1B3B6F"/>
                 </a:solidFill>
                 <a:latin typeface="Amiri" pitchFamily="2" charset="-78"/>
+                <a:ea typeface="Amiri" pitchFamily="2" charset="-78"/>
                 <a:cs typeface="Amiri" pitchFamily="2" charset="-78"/>
               </a:rPr>
               <a:t>إِنَّ التَّدْرِيبَ اليَوْمِيَّ هُوَ الحَلُّ، لِذٰلِكَ سَأَحُلُّ عَشْرَ مَسَائِلَ كُلَّ يَوْمٍ، لِكَيْ أَتَعَوَّدَ عَلَى الأَسْئِلَةِ.</a:t>
@@ -13268,6 +13379,7 @@
                   <a:srgbClr val="1B3B6F"/>
                 </a:solidFill>
                 <a:latin typeface="Amiri" pitchFamily="2" charset="-78"/>
+                <a:ea typeface="Amiri" pitchFamily="2" charset="-78"/>
                 <a:cs typeface="Amiri" pitchFamily="2" charset="-78"/>
               </a:rPr>
               <a:t>مَا خُطَّتُكَ لِلرِّيَاضِيَّاتِ إِذَنْ؟</a:t>
@@ -13371,6 +13483,7 @@
                   <a:srgbClr val="1B3B6F"/>
                 </a:solidFill>
                 <a:latin typeface="Amiri" pitchFamily="2" charset="-78"/>
+                <a:ea typeface="Amiri" pitchFamily="2" charset="-78"/>
                 <a:cs typeface="Amiri" pitchFamily="2" charset="-78"/>
               </a:rPr>
               <a:t>لَا تُؤَجِّلِ المُرَاجَعَةَ، وَمِنَ المُفِيدِ أَنْ تَبْدَأَ قَبْلَ الامْتِحَانِ بِشَهْرٍ عَلَى الأَقَلِّ.</a:t>
@@ -13447,6 +13560,7 @@
                   <a:srgbClr val="1B3B6F"/>
                 </a:solidFill>
                 <a:latin typeface="Amiri" pitchFamily="2" charset="-78"/>
+                <a:ea typeface="Amiri" pitchFamily="2" charset="-78"/>
                 <a:cs typeface="Amiri" pitchFamily="2" charset="-78"/>
               </a:rPr>
               <a:t>وَمَاذَا تَقُولُ لِطَالِبٍ أَصْغَرَ مِنْكَ؟</a:t>
@@ -13656,6 +13770,7 @@
                   <a:srgbClr val="D4AF37"/>
                 </a:solidFill>
                 <a:latin typeface="Amiri" pitchFamily="2" charset="-78"/>
+                <a:ea typeface="Amiri" pitchFamily="2" charset="-78"/>
                 <a:cs typeface="Amiri" pitchFamily="2" charset="-78"/>
               </a:rPr>
               <a:t>م</a:t>
@@ -13976,6 +14091,7 @@
                   <a:srgbClr val="8A6D1E"/>
                 </a:solidFill>
                 <a:latin typeface="Amiri" pitchFamily="2" charset="-78"/>
+                <a:ea typeface="Amiri" pitchFamily="2" charset="-78"/>
                 <a:cs typeface="Amiri" pitchFamily="2" charset="-78"/>
               </a:rPr>
               <a:t>نَمُوذَجُ الإِجَابَةِ</a:t>
@@ -14218,6 +14334,7 @@
                   <a:srgbClr val="1B3B6F"/>
                 </a:solidFill>
                 <a:latin typeface="Amiri" pitchFamily="2" charset="-78"/>
+                <a:ea typeface="Amiri" pitchFamily="2" charset="-78"/>
                 <a:cs typeface="Amiri" pitchFamily="2" charset="-78"/>
               </a:rPr>
               <a:t>لِأَنَّ كَثِيرًا مِنْهُمْ يَرْبِطُونَ مُسْتَقْبَلَهُمْ كُلَّهُ بِدَرَجَةٍ وَاحِدَةٍ، مِمَّا يُؤَدِّي إِلَى قِلَّةِ النَّوْمِ وَضَعْفِ التَّرْكِيزِ.</a:t>
@@ -14294,6 +14411,7 @@
                   <a:srgbClr val="1B3B6F"/>
                 </a:solidFill>
                 <a:latin typeface="Amiri" pitchFamily="2" charset="-78"/>
+                <a:ea typeface="Amiri" pitchFamily="2" charset="-78"/>
                 <a:cs typeface="Amiri" pitchFamily="2" charset="-78"/>
               </a:rPr>
               <a:t>لِمَاذَا يَشْعُرُ الطُّلَّابُ بِالقَلَقِ قَبْلَ الامْتِحَانَاتِ؟</a:t>
@@ -14397,6 +14515,7 @@
                   <a:srgbClr val="1B3B6F"/>
                 </a:solidFill>
                 <a:latin typeface="Amiri" pitchFamily="2" charset="-78"/>
+                <a:ea typeface="Amiri" pitchFamily="2" charset="-78"/>
                 <a:cs typeface="Amiri" pitchFamily="2" charset="-78"/>
               </a:rPr>
               <a:t>نَعَمْ، كُنْتُ أَسْهَرُ حَتَّى الفَجْرِ قَبْلَ كُلِّ امْتِحَانٍ، إِلَى أَنْ نَسِيتُ كُلَّ شَيْءٍ فِي امْتِحَانِ الفِيزْيَاءِ، فَغَيَّرْتُ طَرِيقَتِي تَمَامًا.</a:t>
@@ -14473,6 +14592,7 @@
                   <a:srgbClr val="1B3B6F"/>
                 </a:solidFill>
                 <a:latin typeface="Amiri" pitchFamily="2" charset="-78"/>
+                <a:ea typeface="Amiri" pitchFamily="2" charset="-78"/>
                 <a:cs typeface="Amiri" pitchFamily="2" charset="-78"/>
               </a:rPr>
               <a:t>هَلْ مَرَرْتَ بِتَجْرِبَةٍ كَهٰذِهِ؟</a:t>
@@ -14576,6 +14696,7 @@
                   <a:srgbClr val="1B3B6F"/>
                 </a:solidFill>
                 <a:latin typeface="Amiri" pitchFamily="2" charset="-78"/>
+                <a:ea typeface="Amiri" pitchFamily="2" charset="-78"/>
                 <a:cs typeface="Amiri" pitchFamily="2" charset="-78"/>
               </a:rPr>
               <a:t>أَوَّلًا، ضَعُوا جَدْوَلًا وَاقِعِيًّا؛ ثَانِيًا، لَا تُقَارِنُوا أَنْفُسَكُمْ بِغَيْرِكُمْ؛ وَأَخِيرًا، إِنَّ النَّوْمَ جُزْءٌ مِنَ المُرَاجَعَةِ لَا عَدُوُّهَا.</a:t>
@@ -14652,6 +14773,7 @@
                   <a:srgbClr val="1B3B6F"/>
                 </a:solidFill>
                 <a:latin typeface="Amiri" pitchFamily="2" charset="-78"/>
+                <a:ea typeface="Amiri" pitchFamily="2" charset="-78"/>
                 <a:cs typeface="Amiri" pitchFamily="2" charset="-78"/>
               </a:rPr>
               <a:t>مَا نَصِيحَتُكَ لِلطُّلَّابِ؟</a:t>
@@ -14755,6 +14877,7 @@
                   <a:srgbClr val="1B3B6F"/>
                 </a:solidFill>
                 <a:latin typeface="Amiri" pitchFamily="2" charset="-78"/>
+                <a:ea typeface="Amiri" pitchFamily="2" charset="-78"/>
                 <a:cs typeface="Amiri" pitchFamily="2" charset="-78"/>
               </a:rPr>
               <a:t>صَحِيحٌ أَنَّهَا ضَرُورِيَّةٌ لِقِيَاسِ التَّقَدُّمِ، غَيْرَ أَنَّهَا لَا تَقِيسُ الإِبْدَاعَ وَلَا التَّعَاوُنَ.</a:t>
@@ -14831,6 +14954,7 @@
                   <a:srgbClr val="1B3B6F"/>
                 </a:solidFill>
                 <a:latin typeface="Amiri" pitchFamily="2" charset="-78"/>
+                <a:ea typeface="Amiri" pitchFamily="2" charset="-78"/>
                 <a:cs typeface="Amiri" pitchFamily="2" charset="-78"/>
               </a:rPr>
               <a:t>أَلَيْسَتِ الامْتِحَانَاتُ ضَرُورِيَّةً؟</a:t>
@@ -14934,6 +15058,7 @@
                   <a:srgbClr val="1B3B6F"/>
                 </a:solidFill>
                 <a:latin typeface="Amiri" pitchFamily="2" charset="-78"/>
+                <a:ea typeface="Amiri" pitchFamily="2" charset="-78"/>
                 <a:cs typeface="Amiri" pitchFamily="2" charset="-78"/>
               </a:rPr>
               <a:t>لَوْ أَلْغَيْتُهَا، لَوَضَعْتُ مَكَانَهَا مَشَارِيعَ طَوِيلَةً يُقَيَّمُ فِيهَا الطَّالِبُ عَلَى مَدَارِ السَّنَةِ.</a:t>
@@ -15010,6 +15135,7 @@
                   <a:srgbClr val="1B3B6F"/>
                 </a:solidFill>
                 <a:latin typeface="Amiri" pitchFamily="2" charset="-78"/>
+                <a:ea typeface="Amiri" pitchFamily="2" charset="-78"/>
                 <a:cs typeface="Amiri" pitchFamily="2" charset="-78"/>
               </a:rPr>
               <a:t>لَوْ أَلْغَيْتَ الامْتِحَانَاتِ، مَاذَا تَضَعُ مَكَانَهَا؟</a:t>
@@ -15219,6 +15345,7 @@
                   <a:srgbClr val="D4AF37"/>
                 </a:solidFill>
                 <a:latin typeface="Amiri" pitchFamily="2" charset="-78"/>
+                <a:ea typeface="Amiri" pitchFamily="2" charset="-78"/>
                 <a:cs typeface="Amiri" pitchFamily="2" charset="-78"/>
               </a:rPr>
               <a:t>م</a:t>
@@ -15539,6 +15666,7 @@
                   <a:srgbClr val="8A6D1E"/>
                 </a:solidFill>
                 <a:latin typeface="Amiri" pitchFamily="2" charset="-78"/>
+                <a:ea typeface="Amiri" pitchFamily="2" charset="-78"/>
                 <a:cs typeface="Amiri" pitchFamily="2" charset="-78"/>
               </a:rPr>
               <a:t>كَيْفَ أَدْرُسُ</a:t>
@@ -15819,6 +15947,7 @@
                   <a:srgbClr val="1B3B6F"/>
                 </a:solidFill>
                 <a:latin typeface="Amiri" pitchFamily="2" charset="-78"/>
+                <a:ea typeface="Amiri" pitchFamily="2" charset="-78"/>
                 <a:cs typeface="Amiri" pitchFamily="2" charset="-78"/>
               </a:rPr>
               <a:t>أُرَاجِعُ فِي …</a:t>
@@ -15895,6 +16024,7 @@
                   <a:srgbClr val="1B3B6F"/>
                 </a:solidFill>
                 <a:latin typeface="Amiri" pitchFamily="2" charset="-78"/>
+                <a:ea typeface="Amiri" pitchFamily="2" charset="-78"/>
                 <a:cs typeface="Amiri" pitchFamily="2" charset="-78"/>
               </a:rPr>
               <a:t>أَيْنَ تُرَاجِعُ عَادَةً؟</a:t>
@@ -16063,6 +16193,7 @@
                   <a:srgbClr val="1B3B6F"/>
                 </a:solidFill>
                 <a:latin typeface="Amiri" pitchFamily="2" charset="-78"/>
+                <a:ea typeface="Amiri" pitchFamily="2" charset="-78"/>
                 <a:cs typeface="Amiri" pitchFamily="2" charset="-78"/>
               </a:rPr>
               <a:t>أُرَاجِعُ فِي …</a:t>
@@ -16139,6 +16270,7 @@
                   <a:srgbClr val="1B3B6F"/>
                 </a:solidFill>
                 <a:latin typeface="Amiri" pitchFamily="2" charset="-78"/>
+                <a:ea typeface="Amiri" pitchFamily="2" charset="-78"/>
                 <a:cs typeface="Amiri" pitchFamily="2" charset="-78"/>
               </a:rPr>
               <a:t>مَتَى تُرَاجِعُ؟</a:t>
@@ -16307,6 +16439,7 @@
                   <a:srgbClr val="1B3B6F"/>
                 </a:solidFill>
                 <a:latin typeface="Amiri" pitchFamily="2" charset="-78"/>
+                <a:ea typeface="Amiri" pitchFamily="2" charset="-78"/>
                 <a:cs typeface="Amiri" pitchFamily="2" charset="-78"/>
               </a:rPr>
               <a:t>نَعَمْ / لَا، …</a:t>
@@ -16383,6 +16516,7 @@
                   <a:srgbClr val="1B3B6F"/>
                 </a:solidFill>
                 <a:latin typeface="Amiri" pitchFamily="2" charset="-78"/>
+                <a:ea typeface="Amiri" pitchFamily="2" charset="-78"/>
                 <a:cs typeface="Amiri" pitchFamily="2" charset="-78"/>
               </a:rPr>
               <a:t>هَلْ تَشْعُرُ بِالقَلَقِ قَبْلَ الامْتِحَانِ؟</a:t>
@@ -16551,6 +16685,7 @@
                   <a:srgbClr val="1B3B6F"/>
                 </a:solidFill>
                 <a:latin typeface="Amiri" pitchFamily="2" charset="-78"/>
+                <a:ea typeface="Amiri" pitchFamily="2" charset="-78"/>
                 <a:cs typeface="Amiri" pitchFamily="2" charset="-78"/>
               </a:rPr>
               <a:t>أَصْعَبُ امْتِحَانٍ …</a:t>
@@ -16627,6 +16762,7 @@
                   <a:srgbClr val="1B3B6F"/>
                 </a:solidFill>
                 <a:latin typeface="Amiri" pitchFamily="2" charset="-78"/>
+                <a:ea typeface="Amiri" pitchFamily="2" charset="-78"/>
                 <a:cs typeface="Amiri" pitchFamily="2" charset="-78"/>
               </a:rPr>
               <a:t>مَا أَصْعَبُ امْتِحَانٍ عِنْدَكَ؟</a:t>
@@ -16795,6 +16931,7 @@
                   <a:srgbClr val="1B3B6F"/>
                 </a:solidFill>
                 <a:latin typeface="Amiri" pitchFamily="2" charset="-78"/>
+                <a:ea typeface="Amiri" pitchFamily="2" charset="-78"/>
                 <a:cs typeface="Amiri" pitchFamily="2" charset="-78"/>
               </a:rPr>
               <a:t>يَنْبَغِي أَنْ …</a:t>
@@ -16871,6 +17008,7 @@
                   <a:srgbClr val="1B3B6F"/>
                 </a:solidFill>
                 <a:latin typeface="Amiri" pitchFamily="2" charset="-78"/>
+                <a:ea typeface="Amiri" pitchFamily="2" charset="-78"/>
                 <a:cs typeface="Amiri" pitchFamily="2" charset="-78"/>
               </a:rPr>
               <a:t>مَا نَصِيحَتُكَ لِصَدِيقٍ قَلِقٍ؟</a:t>
@@ -17025,6 +17163,7 @@
                   <a:srgbClr val="1B3B6F"/>
                 </a:solidFill>
                 <a:latin typeface="Amiri" pitchFamily="2" charset="-78"/>
+                <a:ea typeface="Amiri" pitchFamily="2" charset="-78"/>
                 <a:cs typeface="Amiri" pitchFamily="2" charset="-78"/>
               </a:rPr>
               <a:t>عَفْوًا، هَلْ يُمْكِنُ أَنْ تُعِيدَ السُّؤَالَ؟</a:t>
@@ -17158,6 +17297,7 @@
                   <a:srgbClr val="D4AF37"/>
                 </a:solidFill>
                 <a:latin typeface="Amiri" pitchFamily="2" charset="-78"/>
+                <a:ea typeface="Amiri" pitchFamily="2" charset="-78"/>
                 <a:cs typeface="Amiri" pitchFamily="2" charset="-78"/>
               </a:rPr>
               <a:t>م</a:t>
@@ -17478,6 +17618,7 @@
                   <a:srgbClr val="8A6D1E"/>
                 </a:solidFill>
                 <a:latin typeface="Amiri" pitchFamily="2" charset="-78"/>
+                <a:ea typeface="Amiri" pitchFamily="2" charset="-78"/>
                 <a:cs typeface="Amiri" pitchFamily="2" charset="-78"/>
               </a:rPr>
               <a:t>اسْتِرَاتِيجِيَّاتُ التَّعَلُّمِ</a:t>
@@ -17758,6 +17899,7 @@
                   <a:srgbClr val="1B3B6F"/>
                 </a:solidFill>
                 <a:latin typeface="Amiri" pitchFamily="2" charset="-78"/>
+                <a:ea typeface="Amiri" pitchFamily="2" charset="-78"/>
                 <a:cs typeface="Amiri" pitchFamily="2" charset="-78"/>
               </a:rPr>
               <a:t>إِنَّ أَفْضَلَ طَرِيقَةٍ … لِأَنَّ …</a:t>
@@ -17834,6 +17976,7 @@
                   <a:srgbClr val="1B3B6F"/>
                 </a:solidFill>
                 <a:latin typeface="Amiri" pitchFamily="2" charset="-78"/>
+                <a:ea typeface="Amiri" pitchFamily="2" charset="-78"/>
                 <a:cs typeface="Amiri" pitchFamily="2" charset="-78"/>
               </a:rPr>
               <a:t>مَا أَفْضَلُ طَرِيقَةٍ لِلْمُرَاجَعَةِ فِي رَأْيِكَ؟</a:t>
@@ -17937,6 +18080,7 @@
                   <a:srgbClr val="1B3B6F"/>
                 </a:solidFill>
                 <a:latin typeface="Amiri" pitchFamily="2" charset="-78"/>
+                <a:ea typeface="Amiri" pitchFamily="2" charset="-78"/>
                 <a:cs typeface="Amiri" pitchFamily="2" charset="-78"/>
               </a:rPr>
               <a:t>كَانَ … وَكُنْتُ … لٰكِنَّ …</a:t>
@@ -18013,6 +18157,7 @@
                   <a:srgbClr val="1B3B6F"/>
                 </a:solidFill>
                 <a:latin typeface="Amiri" pitchFamily="2" charset="-78"/>
+                <a:ea typeface="Amiri" pitchFamily="2" charset="-78"/>
                 <a:cs typeface="Amiri" pitchFamily="2" charset="-78"/>
               </a:rPr>
               <a:t>صِفِ امْتِحَانًا لَا تَنْسَاهُ.</a:t>
@@ -18116,6 +18261,7 @@
                   <a:srgbClr val="1B3B6F"/>
                 </a:solidFill>
                 <a:latin typeface="Amiri" pitchFamily="2" charset="-78"/>
+                <a:ea typeface="Amiri" pitchFamily="2" charset="-78"/>
                 <a:cs typeface="Amiri" pitchFamily="2" charset="-78"/>
               </a:rPr>
               <a:t>أُفَضِّلُ … لِأَنَّ … لٰكِنَّ …</a:t>
@@ -18192,6 +18338,7 @@
                   <a:srgbClr val="1B3B6F"/>
                 </a:solidFill>
                 <a:latin typeface="Amiri" pitchFamily="2" charset="-78"/>
+                <a:ea typeface="Amiri" pitchFamily="2" charset="-78"/>
                 <a:cs typeface="Amiri" pitchFamily="2" charset="-78"/>
               </a:rPr>
               <a:t>هَلْ تُفَضِّلُ الدِّرَاسَةَ وَحْدَكَ أَمْ مَعَ الآخَرِينَ؟</a:t>
@@ -18295,6 +18442,7 @@
                   <a:srgbClr val="1B3B6F"/>
                 </a:solidFill>
                 <a:latin typeface="Amiri" pitchFamily="2" charset="-78"/>
+                <a:ea typeface="Amiri" pitchFamily="2" charset="-78"/>
                 <a:cs typeface="Amiri" pitchFamily="2" charset="-78"/>
               </a:rPr>
               <a:t>أَضَعُ جَدْوَلًا … وَأُخَصِّصُ …</a:t>
@@ -18371,6 +18519,7 @@
                   <a:srgbClr val="1B3B6F"/>
                 </a:solidFill>
                 <a:latin typeface="Amiri" pitchFamily="2" charset="-78"/>
+                <a:ea typeface="Amiri" pitchFamily="2" charset="-78"/>
                 <a:cs typeface="Amiri" pitchFamily="2" charset="-78"/>
               </a:rPr>
               <a:t>كَيْفَ تُنَظِّمُ وَقْتَكَ فِي فَتْرَةِ الامْتِحَانَاتِ؟</a:t>
@@ -18474,6 +18623,7 @@
                   <a:srgbClr val="1B3B6F"/>
                 </a:solidFill>
                 <a:latin typeface="Amiri" pitchFamily="2" charset="-78"/>
+                <a:ea typeface="Amiri" pitchFamily="2" charset="-78"/>
                 <a:cs typeface="Amiri" pitchFamily="2" charset="-78"/>
               </a:rPr>
               <a:t>سَأَبْدَأُ … وَلَنْ …</a:t>
@@ -18550,6 +18700,7 @@
                   <a:srgbClr val="1B3B6F"/>
                 </a:solidFill>
                 <a:latin typeface="Amiri" pitchFamily="2" charset="-78"/>
+                <a:ea typeface="Amiri" pitchFamily="2" charset="-78"/>
                 <a:cs typeface="Amiri" pitchFamily="2" charset="-78"/>
               </a:rPr>
               <a:t>مَاذَا سَتُغَيِّرُ فِي طَرِيقَةِ دِرَاسَتِكَ؟</a:t>
@@ -18759,6 +18910,7 @@
                   <a:srgbClr val="D4AF37"/>
                 </a:solidFill>
                 <a:latin typeface="Amiri" pitchFamily="2" charset="-78"/>
+                <a:ea typeface="Amiri" pitchFamily="2" charset="-78"/>
                 <a:cs typeface="Amiri" pitchFamily="2" charset="-78"/>
               </a:rPr>
               <a:t>م</a:t>
@@ -19079,6 +19231,7 @@
                   <a:srgbClr val="8A6D1E"/>
                 </a:solidFill>
                 <a:latin typeface="Amiri" pitchFamily="2" charset="-78"/>
+                <a:ea typeface="Amiri" pitchFamily="2" charset="-78"/>
                 <a:cs typeface="Amiri" pitchFamily="2" charset="-78"/>
               </a:rPr>
               <a:t>الامْتِحَانَاتُ وَالنَّجَاحُ</a:t>
@@ -19359,6 +19512,7 @@
                   <a:srgbClr val="1B3B6F"/>
                 </a:solidFill>
                 <a:latin typeface="Amiri" pitchFamily="2" charset="-78"/>
+                <a:ea typeface="Amiri" pitchFamily="2" charset="-78"/>
                 <a:cs typeface="Amiri" pitchFamily="2" charset="-78"/>
               </a:rPr>
               <a:t>صَحِيحٌ أَنَّ … غَيْرَ أَنَّ …</a:t>
@@ -19435,6 +19589,7 @@
                   <a:srgbClr val="1B3B6F"/>
                 </a:solidFill>
                 <a:latin typeface="Amiri" pitchFamily="2" charset="-78"/>
+                <a:ea typeface="Amiri" pitchFamily="2" charset="-78"/>
                 <a:cs typeface="Amiri" pitchFamily="2" charset="-78"/>
               </a:rPr>
               <a:t>هَلْ تَقِيسُ الامْتِحَانَاتُ ذَكَاءَ الطَّالِبِ؟</a:t>
@@ -19538,6 +19693,7 @@
                   <a:srgbClr val="1B3B6F"/>
                 </a:solidFill>
                 <a:latin typeface="Amiri" pitchFamily="2" charset="-78"/>
+                <a:ea typeface="Amiri" pitchFamily="2" charset="-78"/>
                 <a:cs typeface="Amiri" pitchFamily="2" charset="-78"/>
               </a:rPr>
               <a:t>مِنْ نَاحِيَةٍ … وَمِنْ نَاحِيَةٍ أُخْرَى …</a:t>
@@ -19614,6 +19770,7 @@
                   <a:srgbClr val="1B3B6F"/>
                 </a:solidFill>
                 <a:latin typeface="Amiri" pitchFamily="2" charset="-78"/>
+                <a:ea typeface="Amiri" pitchFamily="2" charset="-78"/>
                 <a:cs typeface="Amiri" pitchFamily="2" charset="-78"/>
               </a:rPr>
               <a:t>هَلِ الدُّرُوسُ الخُصُوصِيَّةُ ضَرُورِيَّةٌ؟</a:t>
@@ -19717,6 +19874,7 @@
                   <a:srgbClr val="1B3B6F"/>
                 </a:solidFill>
                 <a:latin typeface="Amiri" pitchFamily="2" charset="-78"/>
+                <a:ea typeface="Amiri" pitchFamily="2" charset="-78"/>
                 <a:cs typeface="Amiri" pitchFamily="2" charset="-78"/>
               </a:rPr>
               <a:t>إِنَّ التَّطْبِيقَاتِ … لٰكِنَّ …</a:t>
@@ -19793,6 +19951,7 @@
                   <a:srgbClr val="1B3B6F"/>
                 </a:solidFill>
                 <a:latin typeface="Amiri" pitchFamily="2" charset="-78"/>
+                <a:ea typeface="Amiri" pitchFamily="2" charset="-78"/>
                 <a:cs typeface="Amiri" pitchFamily="2" charset="-78"/>
               </a:rPr>
               <a:t>كَيْفَ تُؤَثِّرُ التِّكْنُولُوجْيَا فِي المُرَاجَعَةِ؟</a:t>
@@ -19896,6 +20055,7 @@
                   <a:srgbClr val="1B3B6F"/>
                 </a:solidFill>
                 <a:latin typeface="Amiri" pitchFamily="2" charset="-78"/>
+                <a:ea typeface="Amiri" pitchFamily="2" charset="-78"/>
                 <a:cs typeface="Amiri" pitchFamily="2" charset="-78"/>
               </a:rPr>
               <a:t>كَانَا يَدْرُسَانِ … أَمَّا أَنَا فَأُشَاهِدُ …</a:t>
@@ -19972,6 +20132,7 @@
                   <a:srgbClr val="1B3B6F"/>
                 </a:solidFill>
                 <a:latin typeface="Amiri" pitchFamily="2" charset="-78"/>
+                <a:ea typeface="Amiri" pitchFamily="2" charset="-78"/>
                 <a:cs typeface="Amiri" pitchFamily="2" charset="-78"/>
               </a:rPr>
               <a:t>كَيْفَ كَانَ وَالِدَاكَ يَدْرُسَانِ؟</a:t>
@@ -20075,6 +20236,7 @@
                   <a:srgbClr val="1B3B6F"/>
                 </a:solidFill>
                 <a:latin typeface="Amiri" pitchFamily="2" charset="-78"/>
+                <a:ea typeface="Amiri" pitchFamily="2" charset="-78"/>
                 <a:cs typeface="Amiri" pitchFamily="2" charset="-78"/>
               </a:rPr>
               <a:t>لَوْ رَسَبْتُ، لَحَزِنْتُ … ثُمَّ …</a:t>
@@ -20151,6 +20313,7 @@
                   <a:srgbClr val="1B3B6F"/>
                 </a:solidFill>
                 <a:latin typeface="Amiri" pitchFamily="2" charset="-78"/>
+                <a:ea typeface="Amiri" pitchFamily="2" charset="-78"/>
                 <a:cs typeface="Amiri" pitchFamily="2" charset="-78"/>
               </a:rPr>
               <a:t>لَوْ رَسَبْتَ فِي امْتِحَانٍ مُهِمٍّ، مَاذَا تَفْعَلُ؟</a:t>
@@ -20360,6 +20523,7 @@
                   <a:srgbClr val="D4AF37"/>
                 </a:solidFill>
                 <a:latin typeface="Amiri" pitchFamily="2" charset="-78"/>
+                <a:ea typeface="Amiri" pitchFamily="2" charset="-78"/>
                 <a:cs typeface="Amiri" pitchFamily="2" charset="-78"/>
               </a:rPr>
               <a:t>م</a:t>
@@ -20680,6 +20844,7 @@
                   <a:srgbClr val="8A6D1E"/>
                 </a:solidFill>
                 <a:latin typeface="Amiri" pitchFamily="2" charset="-78"/>
+                <a:ea typeface="Amiri" pitchFamily="2" charset="-78"/>
                 <a:cs typeface="Amiri" pitchFamily="2" charset="-78"/>
               </a:rPr>
               <a:t>آدَابُ الصَّفِّ</a:t>
@@ -22211,6 +22376,7 @@
                   <a:srgbClr val="D4AF37"/>
                 </a:solidFill>
                 <a:latin typeface="Amiri" pitchFamily="2" charset="-78"/>
+                <a:ea typeface="Amiri" pitchFamily="2" charset="-78"/>
                 <a:cs typeface="Amiri" pitchFamily="2" charset="-78"/>
               </a:rPr>
               <a:t>م</a:t>
@@ -22531,6 +22697,7 @@
                   <a:srgbClr val="8A6D1E"/>
                 </a:solidFill>
                 <a:latin typeface="Amiri" pitchFamily="2" charset="-78"/>
+                <a:ea typeface="Amiri" pitchFamily="2" charset="-78"/>
                 <a:cs typeface="Amiri" pitchFamily="2" charset="-78"/>
               </a:rPr>
               <a:t>نَمُوذَجُ الإِجَابَةِ</a:t>
@@ -22773,6 +22940,7 @@
                   <a:srgbClr val="1B3B6F"/>
                 </a:solidFill>
                 <a:latin typeface="Amiri" pitchFamily="2" charset="-78"/>
+                <a:ea typeface="Amiri" pitchFamily="2" charset="-78"/>
                 <a:cs typeface="Amiri" pitchFamily="2" charset="-78"/>
               </a:rPr>
               <a:t>أُرَاجِعُ فِي غُرْفَتِي أَوْ فِي المَكْتَبَةِ.</a:t>
@@ -22849,6 +23017,7 @@
                   <a:srgbClr val="1B3B6F"/>
                 </a:solidFill>
                 <a:latin typeface="Amiri" pitchFamily="2" charset="-78"/>
+                <a:ea typeface="Amiri" pitchFamily="2" charset="-78"/>
                 <a:cs typeface="Amiri" pitchFamily="2" charset="-78"/>
               </a:rPr>
               <a:t>أَيْنَ تُرَاجِعُ عَادَةً؟</a:t>
@@ -22952,6 +23121,7 @@
                   <a:srgbClr val="1B3B6F"/>
                 </a:solidFill>
                 <a:latin typeface="Amiri" pitchFamily="2" charset="-78"/>
+                <a:ea typeface="Amiri" pitchFamily="2" charset="-78"/>
                 <a:cs typeface="Amiri" pitchFamily="2" charset="-78"/>
               </a:rPr>
               <a:t>أُرَاجِعُ فِي المَسَاءِ بَعْدَ العَشَاءِ.</a:t>
@@ -23028,6 +23198,7 @@
                   <a:srgbClr val="1B3B6F"/>
                 </a:solidFill>
                 <a:latin typeface="Amiri" pitchFamily="2" charset="-78"/>
+                <a:ea typeface="Amiri" pitchFamily="2" charset="-78"/>
                 <a:cs typeface="Amiri" pitchFamily="2" charset="-78"/>
               </a:rPr>
               <a:t>مَتَى تُرَاجِعُ؟</a:t>
@@ -23131,6 +23302,7 @@
                   <a:srgbClr val="1B3B6F"/>
                 </a:solidFill>
                 <a:latin typeface="Amiri" pitchFamily="2" charset="-78"/>
+                <a:ea typeface="Amiri" pitchFamily="2" charset="-78"/>
                 <a:cs typeface="Amiri" pitchFamily="2" charset="-78"/>
               </a:rPr>
               <a:t>نَعَمْ، أَشْعُرُ بِالقَلَقِ قَلِيلًا.</a:t>
@@ -23207,6 +23379,7 @@
                   <a:srgbClr val="1B3B6F"/>
                 </a:solidFill>
                 <a:latin typeface="Amiri" pitchFamily="2" charset="-78"/>
+                <a:ea typeface="Amiri" pitchFamily="2" charset="-78"/>
                 <a:cs typeface="Amiri" pitchFamily="2" charset="-78"/>
               </a:rPr>
               <a:t>هَلْ تَشْعُرُ بِالقَلَقِ قَبْلَ الامْتِحَانِ؟</a:t>
@@ -23310,6 +23483,7 @@
                   <a:srgbClr val="1B3B6F"/>
                 </a:solidFill>
                 <a:latin typeface="Amiri" pitchFamily="2" charset="-78"/>
+                <a:ea typeface="Amiri" pitchFamily="2" charset="-78"/>
                 <a:cs typeface="Amiri" pitchFamily="2" charset="-78"/>
               </a:rPr>
               <a:t>أَصْعَبُ امْتِحَانٍ عِنْدِي امْتِحَانُ الفِيزْيَاءِ.</a:t>
@@ -23386,6 +23560,7 @@
                   <a:srgbClr val="1B3B6F"/>
                 </a:solidFill>
                 <a:latin typeface="Amiri" pitchFamily="2" charset="-78"/>
+                <a:ea typeface="Amiri" pitchFamily="2" charset="-78"/>
                 <a:cs typeface="Amiri" pitchFamily="2" charset="-78"/>
               </a:rPr>
               <a:t>مَا أَصْعَبُ امْتِحَانٍ عِنْدَكَ؟</a:t>
@@ -23489,6 +23664,7 @@
                   <a:srgbClr val="1B3B6F"/>
                 </a:solidFill>
                 <a:latin typeface="Amiri" pitchFamily="2" charset="-78"/>
+                <a:ea typeface="Amiri" pitchFamily="2" charset="-78"/>
                 <a:cs typeface="Amiri" pitchFamily="2" charset="-78"/>
               </a:rPr>
               <a:t>يَنْبَغِي أَنْ يَنَامَ جَيِّدًا وَيَأْكُلَ فُطُورًا صِحِّيًّا.</a:t>
@@ -23565,6 +23741,7 @@
                   <a:srgbClr val="1B3B6F"/>
                 </a:solidFill>
                 <a:latin typeface="Amiri" pitchFamily="2" charset="-78"/>
+                <a:ea typeface="Amiri" pitchFamily="2" charset="-78"/>
                 <a:cs typeface="Amiri" pitchFamily="2" charset="-78"/>
               </a:rPr>
               <a:t>مَا نَصِيحَتُكَ لِصَدِيقٍ قَلِقٍ؟</a:t>
@@ -23774,6 +23951,7 @@
                   <a:srgbClr val="D4AF37"/>
                 </a:solidFill>
                 <a:latin typeface="Amiri" pitchFamily="2" charset="-78"/>
+                <a:ea typeface="Amiri" pitchFamily="2" charset="-78"/>
                 <a:cs typeface="Amiri" pitchFamily="2" charset="-78"/>
               </a:rPr>
               <a:t>م</a:t>
@@ -24094,6 +24272,7 @@
                   <a:srgbClr val="8A6D1E"/>
                 </a:solidFill>
                 <a:latin typeface="Amiri" pitchFamily="2" charset="-78"/>
+                <a:ea typeface="Amiri" pitchFamily="2" charset="-78"/>
                 <a:cs typeface="Amiri" pitchFamily="2" charset="-78"/>
               </a:rPr>
               <a:t>نَمُوذَجُ الإِجَابَةِ</a:t>
@@ -24336,6 +24515,7 @@
                   <a:srgbClr val="1B3B6F"/>
                 </a:solidFill>
                 <a:latin typeface="Amiri" pitchFamily="2" charset="-78"/>
+                <a:ea typeface="Amiri" pitchFamily="2" charset="-78"/>
                 <a:cs typeface="Amiri" pitchFamily="2" charset="-78"/>
               </a:rPr>
               <a:t>إِنَّ أَفْضَلَ طَرِيقَةٍ هِيَ حَلُّ الامْتِحَانَاتِ السَّابِقَةِ، لِأَنَّهَا تُعَلِّمُنَا نَوْعَ الأَسْئِلَةِ وَتَنْظِيمَ الوَقْتِ.</a:t>
@@ -24412,6 +24592,7 @@
                   <a:srgbClr val="1B3B6F"/>
                 </a:solidFill>
                 <a:latin typeface="Amiri" pitchFamily="2" charset="-78"/>
+                <a:ea typeface="Amiri" pitchFamily="2" charset="-78"/>
                 <a:cs typeface="Amiri" pitchFamily="2" charset="-78"/>
               </a:rPr>
               <a:t>مَا أَفْضَلُ طَرِيقَةٍ لِلْمُرَاجَعَةِ فِي رَأْيِكَ؟</a:t>
@@ -24515,6 +24696,7 @@
                   <a:srgbClr val="1B3B6F"/>
                 </a:solidFill>
                 <a:latin typeface="Amiri" pitchFamily="2" charset="-78"/>
+                <a:ea typeface="Amiri" pitchFamily="2" charset="-78"/>
                 <a:cs typeface="Amiri" pitchFamily="2" charset="-78"/>
               </a:rPr>
               <a:t>كَانَ امْتِحَانُ العَرَبِيَّةِ الشَّفَهِيُّ، وَكُنْتُ قَلِقًا جِدًّا، لٰكِنَّ المُمْتَحِنَ كَانَ لَطِيفًا، فَنَجَحْتُ بِتَفَوُّقٍ.</a:t>
@@ -24591,6 +24773,7 @@
                   <a:srgbClr val="1B3B6F"/>
                 </a:solidFill>
                 <a:latin typeface="Amiri" pitchFamily="2" charset="-78"/>
+                <a:ea typeface="Amiri" pitchFamily="2" charset="-78"/>
                 <a:cs typeface="Amiri" pitchFamily="2" charset="-78"/>
               </a:rPr>
               <a:t>صِفِ امْتِحَانًا لَا تَنْسَاهُ.</a:t>
@@ -24694,6 +24877,7 @@
                   <a:srgbClr val="1B3B6F"/>
                 </a:solidFill>
                 <a:latin typeface="Amiri" pitchFamily="2" charset="-78"/>
+                <a:ea typeface="Amiri" pitchFamily="2" charset="-78"/>
                 <a:cs typeface="Amiri" pitchFamily="2" charset="-78"/>
               </a:rPr>
               <a:t>أُفَضِّلُ الدِّرَاسَةَ وَحْدِي لِلتَّرْكِيزِ، لٰكِنَّ المُرَاجَعَةَ مَعَ صَدِيقٍ مُفِيدَةٌ قَبْلَ الامْتِحَانِ بِيَوْمٍ.</a:t>
@@ -24770,6 +24954,7 @@
                   <a:srgbClr val="1B3B6F"/>
                 </a:solidFill>
                 <a:latin typeface="Amiri" pitchFamily="2" charset="-78"/>
+                <a:ea typeface="Amiri" pitchFamily="2" charset="-78"/>
                 <a:cs typeface="Amiri" pitchFamily="2" charset="-78"/>
               </a:rPr>
               <a:t>هَلْ تُفَضِّلُ الدِّرَاسَةَ وَحْدَكَ أَمْ مَعَ الآخَرِينَ؟</a:t>
@@ -24873,6 +25058,7 @@
                   <a:srgbClr val="1B3B6F"/>
                 </a:solidFill>
                 <a:latin typeface="Amiri" pitchFamily="2" charset="-78"/>
+                <a:ea typeface="Amiri" pitchFamily="2" charset="-78"/>
                 <a:cs typeface="Amiri" pitchFamily="2" charset="-78"/>
               </a:rPr>
               <a:t>أَضَعُ جَدْوَلًا لِلْمُرَاجَعَةِ، وَأُخَصِّصُ سَاعَتَيْنِ لِكُلِّ مَادَّةٍ، مَعَ اسْتِرَاحَاتٍ قَصِيرَةٍ.</a:t>
@@ -24949,6 +25135,7 @@
                   <a:srgbClr val="1B3B6F"/>
                 </a:solidFill>
                 <a:latin typeface="Amiri" pitchFamily="2" charset="-78"/>
+                <a:ea typeface="Amiri" pitchFamily="2" charset="-78"/>
                 <a:cs typeface="Amiri" pitchFamily="2" charset="-78"/>
               </a:rPr>
               <a:t>كَيْفَ تُنَظِّمُ وَقْتَكَ فِي فَتْرَةِ الامْتِحَانَاتِ؟</a:t>
@@ -25052,6 +25239,7 @@
                   <a:srgbClr val="1B3B6F"/>
                 </a:solidFill>
                 <a:latin typeface="Amiri" pitchFamily="2" charset="-78"/>
+                <a:ea typeface="Amiri" pitchFamily="2" charset="-78"/>
                 <a:cs typeface="Amiri" pitchFamily="2" charset="-78"/>
               </a:rPr>
               <a:t>سَأَبْدَأُ المُرَاجَعَةَ مُبَكِّرًا، وَلَنْ أَسْتَخْدِمَ الهَاتِفَ أَثْنَاءَ الدِّرَاسَةِ.</a:t>
@@ -25128,6 +25316,7 @@
                   <a:srgbClr val="1B3B6F"/>
                 </a:solidFill>
                 <a:latin typeface="Amiri" pitchFamily="2" charset="-78"/>
+                <a:ea typeface="Amiri" pitchFamily="2" charset="-78"/>
                 <a:cs typeface="Amiri" pitchFamily="2" charset="-78"/>
               </a:rPr>
               <a:t>مَاذَا سَتُغَيِّرُ فِي طَرِيقَةِ دِرَاسَتِكَ؟</a:t>
@@ -25337,6 +25526,7 @@
                   <a:srgbClr val="D4AF37"/>
                 </a:solidFill>
                 <a:latin typeface="Amiri" pitchFamily="2" charset="-78"/>
+                <a:ea typeface="Amiri" pitchFamily="2" charset="-78"/>
                 <a:cs typeface="Amiri" pitchFamily="2" charset="-78"/>
               </a:rPr>
               <a:t>م</a:t>
@@ -25657,6 +25847,7 @@
                   <a:srgbClr val="8A6D1E"/>
                 </a:solidFill>
                 <a:latin typeface="Amiri" pitchFamily="2" charset="-78"/>
+                <a:ea typeface="Amiri" pitchFamily="2" charset="-78"/>
                 <a:cs typeface="Amiri" pitchFamily="2" charset="-78"/>
               </a:rPr>
               <a:t>نَمُوذَجُ الإِجَابَةِ</a:t>
@@ -25899,6 +26090,7 @@
                   <a:srgbClr val="1B3B6F"/>
                 </a:solidFill>
                 <a:latin typeface="Amiri" pitchFamily="2" charset="-78"/>
+                <a:ea typeface="Amiri" pitchFamily="2" charset="-78"/>
                 <a:cs typeface="Amiri" pitchFamily="2" charset="-78"/>
               </a:rPr>
               <a:t>صَحِيحٌ أَنَّهَا تَقِيسُ الحِفْظَ وَالفَهْمَ، غَيْرَ أَنَّهَا لَا تَقِيسُ الإِبْدَاعَ أَوِ القُدْرَةَ عَلَى العَمَلِ فِي فَرِيقٍ.</a:t>
@@ -25975,6 +26167,7 @@
                   <a:srgbClr val="1B3B6F"/>
                 </a:solidFill>
                 <a:latin typeface="Amiri" pitchFamily="2" charset="-78"/>
+                <a:ea typeface="Amiri" pitchFamily="2" charset="-78"/>
                 <a:cs typeface="Amiri" pitchFamily="2" charset="-78"/>
               </a:rPr>
               <a:t>هَلْ تَقِيسُ الامْتِحَانَاتُ ذَكَاءَ الطَّالِبِ؟</a:t>
@@ -26078,6 +26271,7 @@
                   <a:srgbClr val="1B3B6F"/>
                 </a:solidFill>
                 <a:latin typeface="Amiri" pitchFamily="2" charset="-78"/>
+                <a:ea typeface="Amiri" pitchFamily="2" charset="-78"/>
                 <a:cs typeface="Amiri" pitchFamily="2" charset="-78"/>
               </a:rPr>
               <a:t>مِنْ نَاحِيَةٍ، تُسَاعِدُ الطَّالِبَ الضَّعِيفَ، وَمِنْ نَاحِيَةٍ أُخْرَى، هِيَ غَالِيَةٌ، مِمَّا يَجْعَلُ الفُرَصَ غَيْرَ مُتَسَاوِيَةٍ.</a:t>
@@ -26154,6 +26348,7 @@
                   <a:srgbClr val="1B3B6F"/>
                 </a:solidFill>
                 <a:latin typeface="Amiri" pitchFamily="2" charset="-78"/>
+                <a:ea typeface="Amiri" pitchFamily="2" charset="-78"/>
                 <a:cs typeface="Amiri" pitchFamily="2" charset="-78"/>
               </a:rPr>
               <a:t>هَلِ الدُّرُوسُ الخُصُوصِيَّةُ ضَرُورِيَّةٌ؟</a:t>
@@ -26257,6 +26452,7 @@
                   <a:srgbClr val="1B3B6F"/>
                 </a:solidFill>
                 <a:latin typeface="Amiri" pitchFamily="2" charset="-78"/>
+                <a:ea typeface="Amiri" pitchFamily="2" charset="-78"/>
                 <a:cs typeface="Amiri" pitchFamily="2" charset="-78"/>
               </a:rPr>
               <a:t>إِنَّ التَّطْبِيقَاتِ التَّعْلِيمِيَّةَ تَجْعَلُ المُرَاجَعَةَ مُمْتِعَةً، لٰكِنَّ الإِشْعَارَاتِ تَقْطَعُ التَّرْكِيزَ كُلَّ دَقِيقَتَيْنِ.</a:t>
@@ -26333,6 +26529,7 @@
                   <a:srgbClr val="1B3B6F"/>
                 </a:solidFill>
                 <a:latin typeface="Amiri" pitchFamily="2" charset="-78"/>
+                <a:ea typeface="Amiri" pitchFamily="2" charset="-78"/>
                 <a:cs typeface="Amiri" pitchFamily="2" charset="-78"/>
               </a:rPr>
               <a:t>كَيْفَ تُؤَثِّرُ التِّكْنُولُوجْيَا فِي المُرَاجَعَةِ؟</a:t>
@@ -26542,6 +26739,7 @@
                   <a:srgbClr val="D4AF37"/>
                 </a:solidFill>
                 <a:latin typeface="Amiri" pitchFamily="2" charset="-78"/>
+                <a:ea typeface="Amiri" pitchFamily="2" charset="-78"/>
                 <a:cs typeface="Amiri" pitchFamily="2" charset="-78"/>
               </a:rPr>
               <a:t>م</a:t>
@@ -26862,6 +27060,7 @@
                   <a:srgbClr val="8A6D1E"/>
                 </a:solidFill>
                 <a:latin typeface="Amiri" pitchFamily="2" charset="-78"/>
+                <a:ea typeface="Amiri" pitchFamily="2" charset="-78"/>
                 <a:cs typeface="Amiri" pitchFamily="2" charset="-78"/>
               </a:rPr>
               <a:t>نَمُوذَجُ الإِجَابَةِ</a:t>
@@ -27104,6 +27303,7 @@
                   <a:srgbClr val="1B3B6F"/>
                 </a:solidFill>
                 <a:latin typeface="Amiri" pitchFamily="2" charset="-78"/>
+                <a:ea typeface="Amiri" pitchFamily="2" charset="-78"/>
                 <a:cs typeface="Amiri" pitchFamily="2" charset="-78"/>
               </a:rPr>
               <a:t>كَانَا يَدْرُسَانِ مِنَ الكُتُبِ فَقَطْ، وَيَحْفَظَانِ كَثِيرًا، أَمَّا أَنَا فَأُشَاهِدُ شُرُوحًا وَأَحُلُّ اخْتِبَارَاتٍ عَلَى الإِنْتَرْنِتِ.</a:t>
@@ -27180,6 +27380,7 @@
                   <a:srgbClr val="1B3B6F"/>
                 </a:solidFill>
                 <a:latin typeface="Amiri" pitchFamily="2" charset="-78"/>
+                <a:ea typeface="Amiri" pitchFamily="2" charset="-78"/>
                 <a:cs typeface="Amiri" pitchFamily="2" charset="-78"/>
               </a:rPr>
               <a:t>كَيْفَ كَانَ وَالِدَاكَ يَدْرُسَانِ؟</a:t>
@@ -27283,6 +27484,7 @@
                   <a:srgbClr val="1B3B6F"/>
                 </a:solidFill>
                 <a:latin typeface="Amiri" pitchFamily="2" charset="-78"/>
+                <a:ea typeface="Amiri" pitchFamily="2" charset="-78"/>
                 <a:cs typeface="Amiri" pitchFamily="2" charset="-78"/>
               </a:rPr>
               <a:t>لَوْ رَسَبْتُ، لَحَزِنْتُ يَوْمًا وَاحِدًا، ثُمَّ لَحَلَّلْتُ أَخْطَائِي، وَلَأَعَدْتُ الامْتِحَانَ بِخُطَّةٍ أَفْضَلَ.</a:t>
@@ -27359,6 +27561,7 @@
                   <a:srgbClr val="1B3B6F"/>
                 </a:solidFill>
                 <a:latin typeface="Amiri" pitchFamily="2" charset="-78"/>
+                <a:ea typeface="Amiri" pitchFamily="2" charset="-78"/>
                 <a:cs typeface="Amiri" pitchFamily="2" charset="-78"/>
               </a:rPr>
               <a:t>لَوْ رَسَبْتَ فِي امْتِحَانٍ مُهِمٍّ، مَاذَا تَفْعَلُ؟</a:t>
@@ -27568,6 +27771,7 @@
                   <a:srgbClr val="D4AF37"/>
                 </a:solidFill>
                 <a:latin typeface="Amiri" pitchFamily="2" charset="-78"/>
+                <a:ea typeface="Amiri" pitchFamily="2" charset="-78"/>
                 <a:cs typeface="Amiri" pitchFamily="2" charset="-78"/>
               </a:rPr>
               <a:t>م</a:t>
@@ -27888,6 +28092,7 @@
                   <a:srgbClr val="8A6D1E"/>
                 </a:solidFill>
                 <a:latin typeface="Amiri" pitchFamily="2" charset="-78"/>
+                <a:ea typeface="Amiri" pitchFamily="2" charset="-78"/>
                 <a:cs typeface="Amiri" pitchFamily="2" charset="-78"/>
               </a:rPr>
               <a:t>قَيِّمْ عَمَلَكَ</a:t>
@@ -29132,6 +29337,7 @@
                   <a:srgbClr val="FFFFFF"/>
                 </a:solidFill>
                 <a:latin typeface="Amiri" pitchFamily="2" charset="-78"/>
+                <a:ea typeface="Amiri" pitchFamily="2" charset="-78"/>
                 <a:cs typeface="Amiri" pitchFamily="2" charset="-78"/>
               </a:rPr>
               <a:t>أَحْسَنْتُمْ! إِلَى اللِّقَاءِ</a:t>
@@ -29284,6 +29490,7 @@
                   <a:srgbClr val="D4AF37"/>
                 </a:solidFill>
                 <a:latin typeface="Amiri" pitchFamily="2" charset="-78"/>
+                <a:ea typeface="Amiri" pitchFamily="2" charset="-78"/>
                 <a:cs typeface="Amiri" pitchFamily="2" charset="-78"/>
               </a:rPr>
               <a:t>وَرْشَةُ الكِتَابَةِ</a:t>
@@ -29417,6 +29624,7 @@
                   <a:srgbClr val="D4AF37"/>
                 </a:solidFill>
                 <a:latin typeface="Amiri" pitchFamily="2" charset="-78"/>
+                <a:ea typeface="Amiri" pitchFamily="2" charset="-78"/>
                 <a:cs typeface="Amiri" pitchFamily="2" charset="-78"/>
               </a:rPr>
               <a:t>م</a:t>
@@ -29737,6 +29945,7 @@
                   <a:srgbClr val="8A6D1E"/>
                 </a:solidFill>
                 <a:latin typeface="Amiri" pitchFamily="2" charset="-78"/>
+                <a:ea typeface="Amiri" pitchFamily="2" charset="-78"/>
                 <a:cs typeface="Amiri" pitchFamily="2" charset="-78"/>
               </a:rPr>
               <a:t>خَرِيطَةُ الوَرْشَةِ</a:t>
@@ -30051,6 +30260,7 @@
                   <a:srgbClr val="1B3B6F"/>
                 </a:solidFill>
                 <a:latin typeface="Amiri" pitchFamily="2" charset="-78"/>
+                <a:ea typeface="Amiri" pitchFamily="2" charset="-78"/>
                 <a:cs typeface="Amiri" pitchFamily="2" charset="-78"/>
               </a:rPr>
               <a:t>كَيْفَ</a:t>
@@ -30327,6 +30537,7 @@
                   <a:srgbClr val="1E6B52"/>
                 </a:solidFill>
                 <a:latin typeface="Amiri" pitchFamily="2" charset="-78"/>
+                <a:ea typeface="Amiri" pitchFamily="2" charset="-78"/>
                 <a:cs typeface="Amiri" pitchFamily="2" charset="-78"/>
               </a:rPr>
               <a:t>تَمْثِيلُ الدَّوْرِ</a:t>
@@ -30603,6 +30814,7 @@
                   <a:srgbClr val="8A6D1E"/>
                 </a:solidFill>
                 <a:latin typeface="Amiri" pitchFamily="2" charset="-78"/>
+                <a:ea typeface="Amiri" pitchFamily="2" charset="-78"/>
                 <a:cs typeface="Amiri" pitchFamily="2" charset="-78"/>
               </a:rPr>
               <a:t>النَّمُوذَجُ</a:t>
@@ -30879,6 +31091,7 @@
                   <a:srgbClr val="1E6B52"/>
                 </a:solidFill>
                 <a:latin typeface="Amiri" pitchFamily="2" charset="-78"/>
+                <a:ea typeface="Amiri" pitchFamily="2" charset="-78"/>
                 <a:cs typeface="Amiri" pitchFamily="2" charset="-78"/>
               </a:rPr>
               <a:t>المُحَادَثَةُ</a:t>
@@ -31155,6 +31368,7 @@
                   <a:srgbClr val="8A6D1E"/>
                 </a:solidFill>
                 <a:latin typeface="Amiri" pitchFamily="2" charset="-78"/>
+                <a:ea typeface="Amiri" pitchFamily="2" charset="-78"/>
                 <a:cs typeface="Amiri" pitchFamily="2" charset="-78"/>
               </a:rPr>
               <a:t>قَيِّمْ</a:t>
@@ -31398,6 +31612,7 @@
                   <a:srgbClr val="D4AF37"/>
                 </a:solidFill>
                 <a:latin typeface="Amiri" pitchFamily="2" charset="-78"/>
+                <a:ea typeface="Amiri" pitchFamily="2" charset="-78"/>
                 <a:cs typeface="Amiri" pitchFamily="2" charset="-78"/>
               </a:rPr>
               <a:t>م</a:t>
@@ -31718,6 +31933,7 @@
                   <a:srgbClr val="8A6D1E"/>
                 </a:solidFill>
                 <a:latin typeface="Amiri" pitchFamily="2" charset="-78"/>
+                <a:ea typeface="Amiri" pitchFamily="2" charset="-78"/>
                 <a:cs typeface="Amiri" pitchFamily="2" charset="-78"/>
               </a:rPr>
               <a:t>امْتِحَانُ التَّحَدُّثِ</a:t>
@@ -32342,6 +32558,7 @@
                   <a:srgbClr val="1B3B6F"/>
                 </a:solidFill>
                 <a:latin typeface="Amiri" pitchFamily="2" charset="-78"/>
+                <a:ea typeface="Amiri" pitchFamily="2" charset="-78"/>
                 <a:cs typeface="Amiri" pitchFamily="2" charset="-78"/>
               </a:rPr>
               <a:t>عَفْوًا، هَلْ يُمْكِنُ أَنْ تُعِيدَ السُّؤَالَ؟</a:t>
@@ -32441,6 +32658,7 @@
                   <a:srgbClr val="1B3B6F"/>
                 </a:solidFill>
                 <a:latin typeface="Amiri" pitchFamily="2" charset="-78"/>
+                <a:ea typeface="Amiri" pitchFamily="2" charset="-78"/>
                 <a:cs typeface="Amiri" pitchFamily="2" charset="-78"/>
               </a:rPr>
               <a:t>لَحْظَةً، دَعْنِي أُفَكِّرُ …</a:t>
@@ -32540,6 +32758,7 @@
                   <a:srgbClr val="1B3B6F"/>
                 </a:solidFill>
                 <a:latin typeface="Amiri" pitchFamily="2" charset="-78"/>
+                <a:ea typeface="Amiri" pitchFamily="2" charset="-78"/>
                 <a:cs typeface="Amiri" pitchFamily="2" charset="-78"/>
               </a:rPr>
               <a:t>أَقْصِدُ …</a:t>
@@ -32711,6 +32930,7 @@
                   <a:srgbClr val="D4AF37"/>
                 </a:solidFill>
                 <a:latin typeface="Amiri" pitchFamily="2" charset="-78"/>
+                <a:ea typeface="Amiri" pitchFamily="2" charset="-78"/>
                 <a:cs typeface="Amiri" pitchFamily="2" charset="-78"/>
               </a:rPr>
               <a:t>م</a:t>
@@ -33031,6 +33251,7 @@
                   <a:srgbClr val="8A6D1E"/>
                 </a:solidFill>
                 <a:latin typeface="Amiri" pitchFamily="2" charset="-78"/>
+                <a:ea typeface="Amiri" pitchFamily="2" charset="-78"/>
                 <a:cs typeface="Amiri" pitchFamily="2" charset="-78"/>
               </a:rPr>
               <a:t>أَفْعَالٌ وَمَصَادِرُ</a:t>
@@ -33334,6 +33555,7 @@
                   <a:srgbClr val="1B3B6F"/>
                 </a:solidFill>
                 <a:latin typeface="Amiri" pitchFamily="2" charset="-78"/>
+                <a:ea typeface="Amiri" pitchFamily="2" charset="-78"/>
                 <a:cs typeface="Amiri" pitchFamily="2" charset="-78"/>
               </a:rPr>
               <a:t>امْتِحَانٌ</a:t>
@@ -33491,6 +33713,7 @@
                   <a:srgbClr val="1B3B6F"/>
                 </a:solidFill>
                 <a:latin typeface="Amiri" pitchFamily="2" charset="-78"/>
+                <a:ea typeface="Amiri" pitchFamily="2" charset="-78"/>
                 <a:cs typeface="Amiri" pitchFamily="2" charset="-78"/>
               </a:rPr>
               <a:t>اخْتِبَارٌ</a:t>
@@ -33594,6 +33817,7 @@
                   <a:srgbClr val="1B3B6F"/>
                 </a:solidFill>
                 <a:latin typeface="Amiri" pitchFamily="2" charset="-78"/>
+                <a:ea typeface="Amiri" pitchFamily="2" charset="-78"/>
                 <a:cs typeface="Amiri" pitchFamily="2" charset="-78"/>
               </a:rPr>
               <a:t>امْتِحَانٌ نِهَائِيٌّ</a:t>
@@ -33697,6 +33921,7 @@
                   <a:srgbClr val="1B3B6F"/>
                 </a:solidFill>
                 <a:latin typeface="Amiri" pitchFamily="2" charset="-78"/>
+                <a:ea typeface="Amiri" pitchFamily="2" charset="-78"/>
                 <a:cs typeface="Amiri" pitchFamily="2" charset="-78"/>
               </a:rPr>
               <a:t>امْتِحَانَاتٌ</a:t>
@@ -33962,6 +34187,7 @@
                   <a:srgbClr val="1B3B6F"/>
                 </a:solidFill>
                 <a:latin typeface="Amiri" pitchFamily="2" charset="-78"/>
+                <a:ea typeface="Amiri" pitchFamily="2" charset="-78"/>
                 <a:cs typeface="Amiri" pitchFamily="2" charset="-78"/>
               </a:rPr>
               <a:t>أُرَاجِعُ</a:t>
@@ -34119,6 +34345,7 @@
                   <a:srgbClr val="1B3B6F"/>
                 </a:solidFill>
                 <a:latin typeface="Amiri" pitchFamily="2" charset="-78"/>
+                <a:ea typeface="Amiri" pitchFamily="2" charset="-78"/>
                 <a:cs typeface="Amiri" pitchFamily="2" charset="-78"/>
               </a:rPr>
               <a:t>المُرَاجَعَةُ</a:t>
@@ -34222,6 +34449,7 @@
                   <a:srgbClr val="1B3B6F"/>
                 </a:solidFill>
                 <a:latin typeface="Amiri" pitchFamily="2" charset="-78"/>
+                <a:ea typeface="Amiri" pitchFamily="2" charset="-78"/>
                 <a:cs typeface="Amiri" pitchFamily="2" charset="-78"/>
               </a:rPr>
               <a:t>سَأُرَاجِعُ</a:t>
@@ -34325,6 +34553,7 @@
                   <a:srgbClr val="1B3B6F"/>
                 </a:solidFill>
                 <a:latin typeface="Amiri" pitchFamily="2" charset="-78"/>
+                <a:ea typeface="Amiri" pitchFamily="2" charset="-78"/>
                 <a:cs typeface="Amiri" pitchFamily="2" charset="-78"/>
               </a:rPr>
               <a:t>رَاجَعْتُ</a:t>
@@ -34590,6 +34819,7 @@
                   <a:srgbClr val="1B3B6F"/>
                 </a:solidFill>
                 <a:latin typeface="Amiri" pitchFamily="2" charset="-78"/>
+                <a:ea typeface="Amiri" pitchFamily="2" charset="-78"/>
                 <a:cs typeface="Amiri" pitchFamily="2" charset="-78"/>
               </a:rPr>
               <a:t>أُرَكِّزُ</a:t>
@@ -34747,6 +34977,7 @@
                   <a:srgbClr val="1B3B6F"/>
                 </a:solidFill>
                 <a:latin typeface="Amiri" pitchFamily="2" charset="-78"/>
+                <a:ea typeface="Amiri" pitchFamily="2" charset="-78"/>
                 <a:cs typeface="Amiri" pitchFamily="2" charset="-78"/>
               </a:rPr>
               <a:t>مُرَكِّزٌ · مُرَكِّزَةٌ</a:t>
@@ -34850,6 +35081,7 @@
                   <a:srgbClr val="1B3B6F"/>
                 </a:solidFill>
                 <a:latin typeface="Amiri" pitchFamily="2" charset="-78"/>
+                <a:ea typeface="Amiri" pitchFamily="2" charset="-78"/>
                 <a:cs typeface="Amiri" pitchFamily="2" charset="-78"/>
               </a:rPr>
               <a:t>التَّرْكِيزُ</a:t>
@@ -35115,6 +35347,7 @@
                   <a:srgbClr val="1B3B6F"/>
                 </a:solidFill>
                 <a:latin typeface="Amiri" pitchFamily="2" charset="-78"/>
+                <a:ea typeface="Amiri" pitchFamily="2" charset="-78"/>
                 <a:cs typeface="Amiri" pitchFamily="2" charset="-78"/>
               </a:rPr>
               <a:t>أُنَظِّمُ وَقْتِي</a:t>
@@ -35272,6 +35505,7 @@
                   <a:srgbClr val="1B3B6F"/>
                 </a:solidFill>
                 <a:latin typeface="Amiri" pitchFamily="2" charset="-78"/>
+                <a:ea typeface="Amiri" pitchFamily="2" charset="-78"/>
                 <a:cs typeface="Amiri" pitchFamily="2" charset="-78"/>
               </a:rPr>
               <a:t>مُنَظَّمٌ · مُنَظَّمَةٌ</a:t>
@@ -35375,6 +35609,7 @@
                   <a:srgbClr val="1B3B6F"/>
                 </a:solidFill>
                 <a:latin typeface="Amiri" pitchFamily="2" charset="-78"/>
+                <a:ea typeface="Amiri" pitchFamily="2" charset="-78"/>
                 <a:cs typeface="Amiri" pitchFamily="2" charset="-78"/>
               </a:rPr>
               <a:t>تَنْظِيمُ الوَقْتِ</a:t>
@@ -35640,6 +35875,7 @@
                   <a:srgbClr val="1B3B6F"/>
                 </a:solidFill>
                 <a:latin typeface="Amiri" pitchFamily="2" charset="-78"/>
+                <a:ea typeface="Amiri" pitchFamily="2" charset="-78"/>
                 <a:cs typeface="Amiri" pitchFamily="2" charset="-78"/>
               </a:rPr>
               <a:t>أَحْفَظُ</a:t>
@@ -35797,6 +36033,7 @@
                   <a:srgbClr val="1B3B6F"/>
                 </a:solidFill>
                 <a:latin typeface="Amiri" pitchFamily="2" charset="-78"/>
+                <a:ea typeface="Amiri" pitchFamily="2" charset="-78"/>
                 <a:cs typeface="Amiri" pitchFamily="2" charset="-78"/>
               </a:rPr>
               <a:t>عَنْ ظَهْرِ قَلْبٍ</a:t>
@@ -35900,6 +36137,7 @@
                   <a:srgbClr val="1B3B6F"/>
                 </a:solidFill>
                 <a:latin typeface="Amiri" pitchFamily="2" charset="-78"/>
+                <a:ea typeface="Amiri" pitchFamily="2" charset="-78"/>
                 <a:cs typeface="Amiri" pitchFamily="2" charset="-78"/>
               </a:rPr>
               <a:t>الحِفْظُ</a:t>
@@ -36165,6 +36403,7 @@
                   <a:srgbClr val="1B3B6F"/>
                 </a:solidFill>
                 <a:latin typeface="Amiri" pitchFamily="2" charset="-78"/>
+                <a:ea typeface="Amiri" pitchFamily="2" charset="-78"/>
                 <a:cs typeface="Amiri" pitchFamily="2" charset="-78"/>
               </a:rPr>
               <a:t>مُلَخَّصٌ</a:t>
@@ -36322,6 +36561,7 @@
                   <a:srgbClr val="1B3B6F"/>
                 </a:solidFill>
                 <a:latin typeface="Amiri" pitchFamily="2" charset="-78"/>
+                <a:ea typeface="Amiri" pitchFamily="2" charset="-78"/>
                 <a:cs typeface="Amiri" pitchFamily="2" charset="-78"/>
               </a:rPr>
               <a:t>خَرِيطَةٌ ذِهْنِيَّةٌ</a:t>
@@ -36425,6 +36665,7 @@
                   <a:srgbClr val="1B3B6F"/>
                 </a:solidFill>
                 <a:latin typeface="Amiri" pitchFamily="2" charset="-78"/>
+                <a:ea typeface="Amiri" pitchFamily="2" charset="-78"/>
                 <a:cs typeface="Amiri" pitchFamily="2" charset="-78"/>
               </a:rPr>
               <a:t>مُلَخَّصَاتٌ</a:t>
@@ -36558,6 +36799,7 @@
                   <a:srgbClr val="D4AF37"/>
                 </a:solidFill>
                 <a:latin typeface="Amiri" pitchFamily="2" charset="-78"/>
+                <a:ea typeface="Amiri" pitchFamily="2" charset="-78"/>
                 <a:cs typeface="Amiri" pitchFamily="2" charset="-78"/>
               </a:rPr>
               <a:t>م</a:t>
@@ -36878,6 +37120,7 @@
                   <a:srgbClr val="8A6D1E"/>
                 </a:solidFill>
                 <a:latin typeface="Amiri" pitchFamily="2" charset="-78"/>
+                <a:ea typeface="Amiri" pitchFamily="2" charset="-78"/>
                 <a:cs typeface="Amiri" pitchFamily="2" charset="-78"/>
               </a:rPr>
               <a:t>النَّصِيحَةُ</a:t>
@@ -37181,6 +37424,7 @@
                   <a:srgbClr val="1B3B6F"/>
                 </a:solidFill>
                 <a:latin typeface="Amiri" pitchFamily="2" charset="-78"/>
+                <a:ea typeface="Amiri" pitchFamily="2" charset="-78"/>
                 <a:cs typeface="Amiri" pitchFamily="2" charset="-78"/>
               </a:rPr>
               <a:t>أَنْجَحُ · أَرْسُبُ</a:t>
@@ -37338,6 +37582,7 @@
                   <a:srgbClr val="1B3B6F"/>
                 </a:solidFill>
                 <a:latin typeface="Amiri" pitchFamily="2" charset="-78"/>
+                <a:ea typeface="Amiri" pitchFamily="2" charset="-78"/>
                 <a:cs typeface="Amiri" pitchFamily="2" charset="-78"/>
               </a:rPr>
               <a:t>الرُّسُوبُ</a:t>
@@ -37441,6 +37686,7 @@
                   <a:srgbClr val="1B3B6F"/>
                 </a:solidFill>
                 <a:latin typeface="Amiri" pitchFamily="2" charset="-78"/>
+                <a:ea typeface="Amiri" pitchFamily="2" charset="-78"/>
                 <a:cs typeface="Amiri" pitchFamily="2" charset="-78"/>
               </a:rPr>
               <a:t>النَّجَاحُ</a:t>
@@ -37706,6 +37952,7 @@
                   <a:srgbClr val="1B3B6F"/>
                 </a:solidFill>
                 <a:latin typeface="Amiri" pitchFamily="2" charset="-78"/>
+                <a:ea typeface="Amiri" pitchFamily="2" charset="-78"/>
                 <a:cs typeface="Amiri" pitchFamily="2" charset="-78"/>
               </a:rPr>
               <a:t>دَرَجَةٌ</a:t>
@@ -37863,6 +38110,7 @@
                   <a:srgbClr val="1B3B6F"/>
                 </a:solidFill>
                 <a:latin typeface="Amiri" pitchFamily="2" charset="-78"/>
+                <a:ea typeface="Amiri" pitchFamily="2" charset="-78"/>
                 <a:cs typeface="Amiri" pitchFamily="2" charset="-78"/>
               </a:rPr>
               <a:t>الدَّرَجَةُ الكَامِلَةُ</a:t>
@@ -37966,6 +38214,7 @@
                   <a:srgbClr val="1B3B6F"/>
                 </a:solidFill>
                 <a:latin typeface="Amiri" pitchFamily="2" charset="-78"/>
+                <a:ea typeface="Amiri" pitchFamily="2" charset="-78"/>
                 <a:cs typeface="Amiri" pitchFamily="2" charset="-78"/>
               </a:rPr>
               <a:t>دَرَجَاتٌ</a:t>
@@ -38231,6 +38480,7 @@
                   <a:srgbClr val="1B3B6F"/>
                 </a:solidFill>
                 <a:latin typeface="Amiri" pitchFamily="2" charset="-78"/>
+                <a:ea typeface="Amiri" pitchFamily="2" charset="-78"/>
                 <a:cs typeface="Amiri" pitchFamily="2" charset="-78"/>
               </a:rPr>
               <a:t>قَلَقٌ · ضَغْطٌ</a:t>
@@ -38388,6 +38638,7 @@
                   <a:srgbClr val="1B3B6F"/>
                 </a:solidFill>
                 <a:latin typeface="Amiri" pitchFamily="2" charset="-78"/>
+                <a:ea typeface="Amiri" pitchFamily="2" charset="-78"/>
                 <a:cs typeface="Amiri" pitchFamily="2" charset="-78"/>
               </a:rPr>
               <a:t>ضَغْطُ الامْتِحَانَاتِ</a:t>
@@ -38491,6 +38742,7 @@
                   <a:srgbClr val="1B3B6F"/>
                 </a:solidFill>
                 <a:latin typeface="Amiri" pitchFamily="2" charset="-78"/>
+                <a:ea typeface="Amiri" pitchFamily="2" charset="-78"/>
                 <a:cs typeface="Amiri" pitchFamily="2" charset="-78"/>
               </a:rPr>
               <a:t>قَلِقٌ · قَلِقَةٌ</a:t>
@@ -38756,6 +39008,7 @@
                   <a:srgbClr val="1B3B6F"/>
                 </a:solidFill>
                 <a:latin typeface="Amiri" pitchFamily="2" charset="-78"/>
+                <a:ea typeface="Amiri" pitchFamily="2" charset="-78"/>
                 <a:cs typeface="Amiri" pitchFamily="2" charset="-78"/>
               </a:rPr>
               <a:t>يَنْبَغِي أَنْ …</a:t>
@@ -38913,6 +39166,7 @@
                   <a:srgbClr val="1B3B6F"/>
                 </a:solidFill>
                 <a:latin typeface="Amiri" pitchFamily="2" charset="-78"/>
+                <a:ea typeface="Amiri" pitchFamily="2" charset="-78"/>
                 <a:cs typeface="Amiri" pitchFamily="2" charset="-78"/>
               </a:rPr>
               <a:t>لَا تَسْهَرْ</a:t>
@@ -39016,6 +39270,7 @@
                   <a:srgbClr val="1B3B6F"/>
                 </a:solidFill>
                 <a:latin typeface="Amiri" pitchFamily="2" charset="-78"/>
+                <a:ea typeface="Amiri" pitchFamily="2" charset="-78"/>
                 <a:cs typeface="Amiri" pitchFamily="2" charset="-78"/>
               </a:rPr>
               <a:t>مِنَ المُفِيدِ أَنْ</a:t>
@@ -39281,6 +39536,7 @@
                   <a:srgbClr val="1B3B6F"/>
                 </a:solidFill>
                 <a:latin typeface="Amiri" pitchFamily="2" charset="-78"/>
+                <a:ea typeface="Amiri" pitchFamily="2" charset="-78"/>
                 <a:cs typeface="Amiri" pitchFamily="2" charset="-78"/>
               </a:rPr>
               <a:t>إِنَّ …</a:t>
@@ -39438,6 +39694,7 @@
                   <a:srgbClr val="1B3B6F"/>
                 </a:solidFill>
                 <a:latin typeface="Amiri" pitchFamily="2" charset="-78"/>
+                <a:ea typeface="Amiri" pitchFamily="2" charset="-78"/>
                 <a:cs typeface="Amiri" pitchFamily="2" charset="-78"/>
               </a:rPr>
               <a:t>لِأَنَّ</a:t>
@@ -39541,6 +39798,7 @@
                   <a:srgbClr val="1B3B6F"/>
                 </a:solidFill>
                 <a:latin typeface="Amiri" pitchFamily="2" charset="-78"/>
+                <a:ea typeface="Amiri" pitchFamily="2" charset="-78"/>
                 <a:cs typeface="Amiri" pitchFamily="2" charset="-78"/>
               </a:rPr>
               <a:t>إِنَّ المُرَاجَعَةَ مُهِمَّةٌ</a:t>
@@ -39806,6 +40064,7 @@
                   <a:srgbClr val="1B3B6F"/>
                 </a:solidFill>
                 <a:latin typeface="Amiri" pitchFamily="2" charset="-78"/>
+                <a:ea typeface="Amiri" pitchFamily="2" charset="-78"/>
                 <a:cs typeface="Amiri" pitchFamily="2" charset="-78"/>
               </a:rPr>
               <a:t>كَانَ …</a:t>
@@ -39963,6 +40222,7 @@
                   <a:srgbClr val="1B3B6F"/>
                 </a:solidFill>
                 <a:latin typeface="Amiri" pitchFamily="2" charset="-78"/>
+                <a:ea typeface="Amiri" pitchFamily="2" charset="-78"/>
                 <a:cs typeface="Amiri" pitchFamily="2" charset="-78"/>
               </a:rPr>
               <a:t>كَانَتِ الأَسْئِلَةُ سَهْلَةً</a:t>
@@ -40066,6 +40326,7 @@
                   <a:srgbClr val="1B3B6F"/>
                 </a:solidFill>
                 <a:latin typeface="Amiri" pitchFamily="2" charset="-78"/>
+                <a:ea typeface="Amiri" pitchFamily="2" charset="-78"/>
                 <a:cs typeface="Amiri" pitchFamily="2" charset="-78"/>
               </a:rPr>
               <a:t>كَانَ الامْتِحَانُ صَعْبًا</a:t>
@@ -40199,6 +40460,7 @@
                   <a:srgbClr val="D4AF37"/>
                 </a:solidFill>
                 <a:latin typeface="Amiri" pitchFamily="2" charset="-78"/>
+                <a:ea typeface="Amiri" pitchFamily="2" charset="-78"/>
                 <a:cs typeface="Amiri" pitchFamily="2" charset="-78"/>
               </a:rPr>
               <a:t>م</a:t>
@@ -40519,6 +40781,7 @@
                   <a:srgbClr val="8A6D1E"/>
                 </a:solidFill>
                 <a:latin typeface="Amiri" pitchFamily="2" charset="-78"/>
+                <a:ea typeface="Amiri" pitchFamily="2" charset="-78"/>
                 <a:cs typeface="Amiri" pitchFamily="2" charset="-78"/>
               </a:rPr>
               <a:t>فِي الغُرَفِ</a:t>
@@ -41695,6 +41958,7 @@
                   <a:srgbClr val="1B3B6F"/>
                 </a:solidFill>
                 <a:latin typeface="Amiri" pitchFamily="2" charset="-78"/>
+                <a:ea typeface="Amiri" pitchFamily="2" charset="-78"/>
                 <a:cs typeface="Amiri" pitchFamily="2" charset="-78"/>
               </a:rPr>
               <a:t>دَوْرُكَ!</a:t>
@@ -41771,6 +42035,7 @@
                   <a:srgbClr val="1B3B6F"/>
                 </a:solidFill>
                 <a:latin typeface="Amiri" pitchFamily="2" charset="-78"/>
+                <a:ea typeface="Amiri" pitchFamily="2" charset="-78"/>
                 <a:cs typeface="Amiri" pitchFamily="2" charset="-78"/>
               </a:rPr>
               <a:t>أَحْسَنْتَ! / أَحْسَنْتِ!</a:t>
@@ -41847,6 +42112,7 @@
                   <a:srgbClr val="1B3B6F"/>
                 </a:solidFill>
                 <a:latin typeface="Amiri" pitchFamily="2" charset="-78"/>
+                <a:ea typeface="Amiri" pitchFamily="2" charset="-78"/>
                 <a:cs typeface="Amiri" pitchFamily="2" charset="-78"/>
               </a:rPr>
               <a:t>تَكَلَّمْ أَكْثَرَ، مِنْ فَضْلِكَ</a:t>
@@ -41923,6 +42189,7 @@
                   <a:srgbClr val="1B3B6F"/>
                 </a:solidFill>
                 <a:latin typeface="Amiri" pitchFamily="2" charset="-78"/>
+                <a:ea typeface="Amiri" pitchFamily="2" charset="-78"/>
                 <a:cs typeface="Amiri" pitchFamily="2" charset="-78"/>
               </a:rPr>
               <a:t>لِمَاذَا؟</a:t>
@@ -42094,6 +42361,7 @@
                   <a:srgbClr val="D4AF37"/>
                 </a:solidFill>
                 <a:latin typeface="Amiri" pitchFamily="2" charset="-78"/>
+                <a:ea typeface="Amiri" pitchFamily="2" charset="-78"/>
                 <a:cs typeface="Amiri" pitchFamily="2" charset="-78"/>
               </a:rPr>
               <a:t>م</a:t>
@@ -42414,6 +42682,7 @@
                   <a:srgbClr val="8A6D1E"/>
                 </a:solidFill>
                 <a:latin typeface="Amiri" pitchFamily="2" charset="-78"/>
+                <a:ea typeface="Amiri" pitchFamily="2" charset="-78"/>
                 <a:cs typeface="Amiri" pitchFamily="2" charset="-78"/>
               </a:rPr>
               <a:t>نُرَاجِعُ مَعًا</a:t>
@@ -42694,6 +42963,7 @@
                   <a:srgbClr val="1B3B6F"/>
                 </a:solidFill>
                 <a:latin typeface="Amiri" pitchFamily="2" charset="-78"/>
+                <a:ea typeface="Amiri" pitchFamily="2" charset="-78"/>
                 <a:cs typeface="Amiri" pitchFamily="2" charset="-78"/>
               </a:rPr>
               <a:t>امْتِحَانِي يَوْمَ …</a:t>
@@ -42770,6 +43040,7 @@
                   <a:srgbClr val="1B3B6F"/>
                 </a:solidFill>
                 <a:latin typeface="Amiri" pitchFamily="2" charset="-78"/>
+                <a:ea typeface="Amiri" pitchFamily="2" charset="-78"/>
                 <a:cs typeface="Amiri" pitchFamily="2" charset="-78"/>
               </a:rPr>
               <a:t>مَتَى امْتِحَانُكَ؟</a:t>
@@ -42938,6 +43209,7 @@
                   <a:srgbClr val="1B3B6F"/>
                 </a:solidFill>
                 <a:latin typeface="Amiri" pitchFamily="2" charset="-78"/>
+                <a:ea typeface="Amiri" pitchFamily="2" charset="-78"/>
                 <a:cs typeface="Amiri" pitchFamily="2" charset="-78"/>
               </a:rPr>
               <a:t>فِي …</a:t>
@@ -43014,6 +43286,7 @@
                   <a:srgbClr val="1B3B6F"/>
                 </a:solidFill>
                 <a:latin typeface="Amiri" pitchFamily="2" charset="-78"/>
+                <a:ea typeface="Amiri" pitchFamily="2" charset="-78"/>
                 <a:cs typeface="Amiri" pitchFamily="2" charset="-78"/>
               </a:rPr>
               <a:t>فِي أَيِّ مَادَّةٍ؟</a:t>
@@ -43182,6 +43455,7 @@
                   <a:srgbClr val="1B3B6F"/>
                 </a:solidFill>
                 <a:latin typeface="Amiri" pitchFamily="2" charset="-78"/>
+                <a:ea typeface="Amiri" pitchFamily="2" charset="-78"/>
                 <a:cs typeface="Amiri" pitchFamily="2" charset="-78"/>
               </a:rPr>
               <a:t>أُرَاجِعُ … وَأَكْتُبُ …</a:t>
@@ -43258,6 +43532,7 @@
                   <a:srgbClr val="1B3B6F"/>
                 </a:solidFill>
                 <a:latin typeface="Amiri" pitchFamily="2" charset="-78"/>
+                <a:ea typeface="Amiri" pitchFamily="2" charset="-78"/>
                 <a:cs typeface="Amiri" pitchFamily="2" charset="-78"/>
               </a:rPr>
               <a:t>كَيْفَ تُرَاجِعُ؟</a:t>
@@ -43426,6 +43701,7 @@
                   <a:srgbClr val="1B3B6F"/>
                 </a:solidFill>
                 <a:latin typeface="Amiri" pitchFamily="2" charset="-78"/>
+                <a:ea typeface="Amiri" pitchFamily="2" charset="-78"/>
                 <a:cs typeface="Amiri" pitchFamily="2" charset="-78"/>
               </a:rPr>
               <a:t>يَنْبَغِي أَنْ …</a:t>
@@ -43502,6 +43778,7 @@
                   <a:srgbClr val="1B3B6F"/>
                 </a:solidFill>
                 <a:latin typeface="Amiri" pitchFamily="2" charset="-78"/>
+                <a:ea typeface="Amiri" pitchFamily="2" charset="-78"/>
                 <a:cs typeface="Amiri" pitchFamily="2" charset="-78"/>
               </a:rPr>
               <a:t>أَنَا قَلِقٌ جِدًّا.</a:t>
@@ -43670,6 +43947,7 @@
                   <a:srgbClr val="1B3B6F"/>
                 </a:solidFill>
                 <a:latin typeface="Amiri" pitchFamily="2" charset="-78"/>
+                <a:ea typeface="Amiri" pitchFamily="2" charset="-78"/>
                 <a:cs typeface="Amiri" pitchFamily="2" charset="-78"/>
               </a:rPr>
               <a:t>نَعَمْ، فِي … السَّاعَةَ …</a:t>
@@ -43746,6 +44024,7 @@
                   <a:srgbClr val="1B3B6F"/>
                 </a:solidFill>
                 <a:latin typeface="Amiri" pitchFamily="2" charset="-78"/>
+                <a:ea typeface="Amiri" pitchFamily="2" charset="-78"/>
                 <a:cs typeface="Amiri" pitchFamily="2" charset="-78"/>
               </a:rPr>
               <a:t>هَلْ نَدْرُسُ مَعًا غَدًا؟</a:t>
@@ -44020,6 +44299,7 @@
                   <a:srgbClr val="D4AF37"/>
                 </a:solidFill>
                 <a:latin typeface="Amiri" pitchFamily="2" charset="-78"/>
+                <a:ea typeface="Amiri" pitchFamily="2" charset="-78"/>
                 <a:cs typeface="Amiri" pitchFamily="2" charset="-78"/>
               </a:rPr>
               <a:t>م</a:t>
@@ -44340,6 +44620,7 @@
                   <a:srgbClr val="8A6D1E"/>
                 </a:solidFill>
                 <a:latin typeface="Amiri" pitchFamily="2" charset="-78"/>
+                <a:ea typeface="Amiri" pitchFamily="2" charset="-78"/>
                 <a:cs typeface="Amiri" pitchFamily="2" charset="-78"/>
               </a:rPr>
               <a:t>نَصِيحَةٌ مِنَ المُعَلِّمِ</a:t>
@@ -44620,6 +44901,7 @@
                   <a:srgbClr val="1B3B6F"/>
                 </a:solidFill>
                 <a:latin typeface="Amiri" pitchFamily="2" charset="-78"/>
+                <a:ea typeface="Amiri" pitchFamily="2" charset="-78"/>
                 <a:cs typeface="Amiri" pitchFamily="2" charset="-78"/>
               </a:rPr>
               <a:t>لَا أَسْتَطِيعُ أَنْ …</a:t>
@@ -44696,6 +44978,7 @@
                   <a:srgbClr val="1B3B6F"/>
                 </a:solidFill>
                 <a:latin typeface="Amiri" pitchFamily="2" charset="-78"/>
+                <a:ea typeface="Amiri" pitchFamily="2" charset="-78"/>
                 <a:cs typeface="Amiri" pitchFamily="2" charset="-78"/>
               </a:rPr>
               <a:t>مَا المُشْكِلَةُ؟</a:t>
@@ -44864,6 +45147,7 @@
                   <a:srgbClr val="1B3B6F"/>
                 </a:solidFill>
                 <a:latin typeface="Amiri" pitchFamily="2" charset="-78"/>
+                <a:ea typeface="Amiri" pitchFamily="2" charset="-78"/>
                 <a:cs typeface="Amiri" pitchFamily="2" charset="-78"/>
               </a:rPr>
               <a:t>أُرَاجِعُ فِي … وَهَاتِفِي …</a:t>
@@ -44940,6 +45224,7 @@
                   <a:srgbClr val="1B3B6F"/>
                 </a:solidFill>
                 <a:latin typeface="Amiri" pitchFamily="2" charset="-78"/>
+                <a:ea typeface="Amiri" pitchFamily="2" charset="-78"/>
                 <a:cs typeface="Amiri" pitchFamily="2" charset="-78"/>
               </a:rPr>
               <a:t>وَأَيْنَ تُرَاجِعُ؟</a:t>
@@ -45108,6 +45393,7 @@
                   <a:srgbClr val="1B3B6F"/>
                 </a:solidFill>
                 <a:latin typeface="Amiri" pitchFamily="2" charset="-78"/>
+                <a:ea typeface="Amiri" pitchFamily="2" charset="-78"/>
                 <a:cs typeface="Amiri" pitchFamily="2" charset="-78"/>
               </a:rPr>
               <a:t>مَاذَا يَنْبَغِي أَنْ …؟</a:t>
@@ -45184,6 +45470,7 @@
                   <a:srgbClr val="1B3B6F"/>
                 </a:solidFill>
                 <a:latin typeface="Amiri" pitchFamily="2" charset="-78"/>
+                <a:ea typeface="Amiri" pitchFamily="2" charset="-78"/>
                 <a:cs typeface="Amiri" pitchFamily="2" charset="-78"/>
               </a:rPr>
               <a:t>هٰذَا هُوَ السَّبَبُ!</a:t>
@@ -45287,6 +45574,7 @@
                   <a:srgbClr val="1B3B6F"/>
                 </a:solidFill>
                 <a:latin typeface="Amiri" pitchFamily="2" charset="-78"/>
+                <a:ea typeface="Amiri" pitchFamily="2" charset="-78"/>
                 <a:cs typeface="Amiri" pitchFamily="2" charset="-78"/>
               </a:rPr>
               <a:t>فِكْرَةٌ جَيِّدَةٌ. سَأُجَرِّبُ …</a:t>
@@ -45363,6 +45651,7 @@
                   <a:srgbClr val="1B3B6F"/>
                 </a:solidFill>
                 <a:latin typeface="Amiri" pitchFamily="2" charset="-78"/>
+                <a:ea typeface="Amiri" pitchFamily="2" charset="-78"/>
                 <a:cs typeface="Amiri" pitchFamily="2" charset="-78"/>
               </a:rPr>
               <a:t>ضَعِ الهَاتِفَ فِي غُرْفَةٍ أُخْرَى، وَخُذْ اسْتِرَاحَةً قَصِيرَةً.</a:t>
@@ -45466,6 +45755,7 @@
                   <a:srgbClr val="1B3B6F"/>
                 </a:solidFill>
                 <a:latin typeface="Amiri" pitchFamily="2" charset="-78"/>
+                <a:ea typeface="Amiri" pitchFamily="2" charset="-78"/>
                 <a:cs typeface="Amiri" pitchFamily="2" charset="-78"/>
               </a:rPr>
               <a:t>كَانَ … لِأَنِّي …</a:t>
@@ -45542,6 +45832,7 @@
                   <a:srgbClr val="1B3B6F"/>
                 </a:solidFill>
                 <a:latin typeface="Amiri" pitchFamily="2" charset="-78"/>
+                <a:ea typeface="Amiri" pitchFamily="2" charset="-78"/>
                 <a:cs typeface="Amiri" pitchFamily="2" charset="-78"/>
               </a:rPr>
               <a:t>كَيْفَ كَانَ امْتِحَانُكَ الأَخِيرُ؟</a:t>
@@ -45716,13 +46007,9 @@
     <a:fontScheme name="Office">
       <a:majorFont>
         <a:latin typeface="Calibri Light" panose="020F0302020204030204"/>
-        <a:ea typeface=""/>
-        <a:cs typeface=""/>
-        <a:font script="Jpan" typeface="游ゴシック Light"/>
-        <a:font script="Hang" typeface="맑은 고딕"/>
-        <a:font script="Hans" typeface="等线 Light"/>
-        <a:font script="Hant" typeface="新細明體"/>
-        <a:font script="Arab" typeface="Times New Roman"/>
+        <a:ea typeface="Amiri" pitchFamily="2" charset="-78"/>
+        <a:cs typeface="Amiri" pitchFamily="2" charset="-78"/>
+        <a:font script="Arab" typeface="Amiri"/>
         <a:font script="Hebr" typeface="Times New Roman"/>
         <a:font script="Thai" typeface="Angsana New"/>
         <a:font script="Ethi" typeface="Nyala"/>
@@ -45768,13 +46055,9 @@
       </a:majorFont>
       <a:minorFont>
         <a:latin typeface="Calibri" panose="020F0502020204030204"/>
-        <a:ea typeface=""/>
-        <a:cs typeface=""/>
-        <a:font script="Jpan" typeface="游ゴシック"/>
-        <a:font script="Hang" typeface="맑은 고딕"/>
-        <a:font script="Hans" typeface="等线"/>
-        <a:font script="Hant" typeface="新細明體"/>
-        <a:font script="Arab" typeface="Arial"/>
+        <a:ea typeface="Amiri" pitchFamily="2" charset="-78"/>
+        <a:cs typeface="Amiri" pitchFamily="2" charset="-78"/>
+        <a:font script="Arab" typeface="Amiri"/>
         <a:font script="Hebr" typeface="Arial"/>
         <a:font script="Thai" typeface="Cordia New"/>
         <a:font script="Ethi" typeface="Nyala"/>
